--- a/docs/descargas/unity/Guia1_Motricidad.pptx
+++ b/docs/descargas/unity/Guia1_Motricidad.pptx
@@ -4764,7 +4764,7 @@
                 </a:solidFill>
                 <a:latin typeface="Calibri"/>
               </a:rPr>
-              <a:t>Requisito: la Guía 0 terminada, con el letrero Kit listo en verde.</a:t>
+              <a:t>Requisito: el kit importado (Guía 0, diapositivas 7 a 9) y el letrero Kit listo en verde.</a:t>
             </a:r>
           </a:p>
         </p:txBody>

--- a/docs/descargas/unity/Guia1_Motricidad.pptx
+++ b/docs/descargas/unity/Guia1_Motricidad.pptx
@@ -21,6 +21,7 @@
     <p:sldId id="269" r:id="rId21"/>
     <p:sldId id="270" r:id="rId22"/>
     <p:sldId id="271" r:id="rId23"/>
+    <p:sldId id="272" r:id="rId24"/>
   </p:sldIdLst>
   <p:sldSz cx="12191695" cy="6858000" type="screen4x3"/>
   <p:notesSz cx="6858000" cy="9144000"/>
@@ -797,7 +798,7 @@
           <a:lstStyle/>
           <a:p>
             <a:r>
-              <a:t>GUION. Este es el error más común al final: el botón no lleva a ninguna parte y la consola dice que la escena no está en Build Settings. Unity solo puede abrir las escenas que estén en esa lista. Arrástrenlas, dejen el menú de primero, y hagan la prueba completa de la derecha, con las dos manos.</a:t>
+              <a:t>GUION. Este paso se repite en cada escena de juego y es corto. El prefab Pausa trae el botón de la esquina, el menú, la cuenta atrás y los ajustes. Lo único que escriben ustedes es el nombre del juego y la categoría, que decide el color. Esc pausa y continúa. El botón de pausa no es un botón normal sino un sprite, porque con el mouse capturado los botones del Canvas no responden.</a:t>
             </a:r>
           </a:p>
         </p:txBody>
@@ -867,7 +868,7 @@
           <a:lstStyle/>
           <a:p>
             <a:r>
-              <a:t>GUION. Esto es lo que convierte el juego en investigación. Cada partida queda como una fila, con la fecha, la mano y la sensibilidad. Su pregunta habla de tiempo de reacción y precisión: aquí están. Abran el archivo en Excel y van a ver las columnas listas para graficar. Esta fila es real: la dejó el juego armado con las piezas que tienen ustedes.</a:t>
+              <a:t>GUION. Este es el error más común al final: el botón no lleva a ninguna parte y la consola dice que la escena no está en Build Settings. Unity solo puede abrir las escenas que estén en esa lista. Arrástrenlas, dejen el menú de primero, y hagan la prueba completa de la derecha, con las dos manos.</a:t>
             </a:r>
           </a:p>
         </p:txBody>
@@ -937,7 +938,7 @@
           <a:lstStyle/>
           <a:p>
             <a:r>
-              <a:t>GUION. Seis errores que les van a salir, con su arreglo. El primero es el más común de todos: UnassignedReferenceException quiere decir que una casilla del Inspector está vacía, y el mensaje dice cuál. No es que el script esté malo: le falta que le digan con qué objeto trabajar.</a:t>
+              <a:t>GUION. Esto es lo que convierte el juego en investigación. Cada partida queda como una fila, con la fecha, la mano y la sensibilidad. Su pregunta habla de tiempo de reacción y precisión: aquí están. Abran el archivo en Excel y van a ver las columnas listas para graficar. Esta fila es real: la dejó el juego armado con las piezas que tienen ustedes.</a:t>
             </a:r>
           </a:p>
         </p:txBody>
@@ -963,6 +964,76 @@
 </file>
 
 <file path=ppt/notesSlides/notesSlide16.xml><?xml version="1.0" encoding="utf-8"?>
+<p:notes xmlns:a="http://schemas.openxmlformats.org/drawingml/2006/main" xmlns:p="http://schemas.openxmlformats.org/presentationml/2006/main" xmlns:r="http://schemas.openxmlformats.org/officeDocument/2006/relationships">
+  <p:cSld>
+    <p:spTree>
+      <p:nvGrpSpPr>
+        <p:cNvPr id="1" name=""/>
+        <p:cNvGrpSpPr/>
+        <p:nvPr/>
+      </p:nvGrpSpPr>
+      <p:grpSpPr>
+        <a:xfrm>
+          <a:off x="0" y="0"/>
+          <a:ext cx="0" cy="0"/>
+          <a:chOff x="0" y="0"/>
+          <a:chExt cx="0" cy="0"/>
+        </a:xfrm>
+      </p:grpSpPr>
+      <p:sp>
+        <p:nvSpPr>
+          <p:cNvPr id="2" name="Slide Image Placeholder 1"/>
+          <p:cNvSpPr>
+            <a:spLocks noGrp="1"/>
+          </p:cNvSpPr>
+          <p:nvPr>
+            <p:ph type="sldImg" idx="2"/>
+          </p:nvPr>
+        </p:nvSpPr>
+        <p:spPr/>
+      </p:sp>
+      <p:sp>
+        <p:nvSpPr>
+          <p:cNvPr id="3" name="Notes Placeholder 2"/>
+          <p:cNvSpPr>
+            <a:spLocks noGrp="1"/>
+          </p:cNvSpPr>
+          <p:nvPr>
+            <p:ph type="body" idx="3" sz="quarter"/>
+          </p:nvPr>
+        </p:nvSpPr>
+        <p:spPr/>
+        <p:txBody>
+          <a:bodyPr/>
+          <a:lstStyle/>
+          <a:p>
+            <a:r>
+              <a:t>GUION. Seis errores que les van a salir, con su arreglo. El primero es el más común de todos: UnassignedReferenceException quiere decir que una casilla del Inspector está vacía, y el mensaje dice cuál. No es que el script esté malo: le falta que le digan con qué objeto trabajar.</a:t>
+            </a:r>
+          </a:p>
+        </p:txBody>
+      </p:sp>
+      <p:sp>
+        <p:nvSpPr>
+          <p:cNvPr id="4" name="Slide Number Placeholder 3"/>
+          <p:cNvSpPr>
+            <a:spLocks noGrp="1"/>
+          </p:cNvSpPr>
+          <p:nvPr>
+            <p:ph type="sldNum" idx="5" sz="quarter"/>
+          </p:nvPr>
+        </p:nvSpPr>
+        <p:spPr/>
+      </p:sp>
+    </p:spTree>
+  </p:cSld>
+  <p:clrMapOvr>
+    <a:masterClrMapping/>
+  </p:clrMapOvr>
+</p:notes>
+</file>
+
+<file path=ppt/notesSlides/notesSlide17.xml><?xml version="1.0" encoding="utf-8"?>
 <p:notes xmlns:a="http://schemas.openxmlformats.org/drawingml/2006/main" xmlns:p="http://schemas.openxmlformats.org/presentationml/2006/main" xmlns:r="http://schemas.openxmlformats.org/officeDocument/2006/relationships">
   <p:cSld>
     <p:spTree>
@@ -5114,7 +5185,7 @@
                 </a:solidFill>
                 <a:latin typeface="Calibri"/>
               </a:rPr>
-              <a:t>Guía 1 · Motricidad  ·  1 de 16</a:t>
+              <a:t>Guía 1 · Motricidad  ·  1 de 17</a:t>
             </a:r>
           </a:p>
         </p:txBody>
@@ -6214,7 +6285,7 @@
                 </a:solidFill>
                 <a:latin typeface="Calibri"/>
               </a:rPr>
-              <a:t>Guía 1 · Motricidad  ·  10 de 16</a:t>
+              <a:t>Guía 1 · Motricidad  ·  10 de 17</a:t>
             </a:r>
           </a:p>
         </p:txBody>
@@ -7183,7 +7254,7 @@
                 </a:solidFill>
                 <a:latin typeface="Calibri"/>
               </a:rPr>
-              <a:t>Guía 1 · Motricidad  ·  11 de 16</a:t>
+              <a:t>Guía 1 · Motricidad  ·  11 de 17</a:t>
             </a:r>
           </a:p>
         </p:txBody>
@@ -8082,7 +8153,7 @@
                 </a:solidFill>
                 <a:latin typeface="Calibri"/>
               </a:rPr>
-              <a:t>Guía 1 · Motricidad  ·  12 de 16</a:t>
+              <a:t>Guía 1 · Motricidad  ·  12 de 17</a:t>
             </a:r>
           </a:p>
         </p:txBody>
@@ -8186,7 +8257,7 @@
                 </a:solidFill>
                 <a:latin typeface="Cambria"/>
               </a:rPr>
-              <a:t>Build Settings: la lista que conecta las escenas</a:t>
+              <a:t>Un paso que se repite: agrega la pausa a cada escena</a:t>
             </a:r>
           </a:p>
         </p:txBody>
@@ -8253,7 +8324,7 @@
         <p:spPr>
           <a:xfrm>
             <a:off x="1051560" y="1664208"/>
-            <a:ext cx="5257800" cy="502920"/>
+            <a:ext cx="5349240" cy="502920"/>
           </a:xfrm>
           <a:prstGeom prst="rect">
             <a:avLst/>
@@ -8272,13 +8343,31 @@
               </a:spcAft>
             </a:pPr>
             <a:r>
+              <a:rPr sz="1500" b="0" i="0">
+                <a:solidFill>
+                  <a:srgbClr val="0A0E1A"/>
+                </a:solidFill>
+                <a:latin typeface="Calibri"/>
+              </a:rPr>
+              <a:t>Arrastra el prefab </a:t>
+            </a:r>
+            <a:r>
               <a:rPr sz="1500" b="1" i="0">
                 <a:solidFill>
                   <a:srgbClr val="0A0E1A"/>
                 </a:solidFill>
                 <a:latin typeface="Calibri"/>
               </a:rPr>
-              <a:t>File &gt; Build Settings...</a:t>
+              <a:t>Pausa</a:t>
+            </a:r>
+            <a:r>
+              <a:rPr sz="1500" b="0" i="0">
+                <a:solidFill>
+                  <a:srgbClr val="0A0E1A"/>
+                </a:solidFill>
+                <a:latin typeface="Calibri"/>
+              </a:rPr>
+              <a:t> (KitEquipo10/Comun/Prefabs) a 10_Colorear, 11_Camino, 12_Runner y 20_Grueso.</a:t>
             </a:r>
           </a:p>
         </p:txBody>
@@ -8291,7 +8380,7 @@
         </p:nvSpPr>
         <p:spPr>
           <a:xfrm>
-            <a:off x="548640" y="2304288"/>
+            <a:off x="548640" y="2395728"/>
             <a:ext cx="347472" cy="347472"/>
           </a:xfrm>
           <a:prstGeom prst="ellipse">
@@ -8344,8 +8433,8 @@
         </p:nvSpPr>
         <p:spPr>
           <a:xfrm>
-            <a:off x="1051560" y="2322576"/>
-            <a:ext cx="5257800" cy="502920"/>
+            <a:off x="1051560" y="2414016"/>
+            <a:ext cx="5349240" cy="502920"/>
           </a:xfrm>
           <a:prstGeom prst="rect">
             <a:avLst/>
@@ -8370,7 +8459,25 @@
                 </a:solidFill>
                 <a:latin typeface="Calibri"/>
               </a:rPr>
-              <a:t>Arrastra las cinco escenas desde Project a la lista Scenes In Build.</a:t>
+              <a:t>Selecciónalo. En el Inspector escribe </a:t>
+            </a:r>
+            <a:r>
+              <a:rPr sz="1500" b="1" i="0">
+                <a:solidFill>
+                  <a:srgbClr val="0A0E1A"/>
+                </a:solidFill>
+                <a:latin typeface="Calibri"/>
+              </a:rPr>
+              <a:t>Nombre Del Juego</a:t>
+            </a:r>
+            <a:r>
+              <a:rPr sz="1500" b="0" i="0">
+                <a:solidFill>
+                  <a:srgbClr val="0A0E1A"/>
+                </a:solidFill>
+                <a:latin typeface="Calibri"/>
+              </a:rPr>
+              <a:t>: Colorear, Camino, Runner o Zona que se achica.</a:t>
             </a:r>
           </a:p>
         </p:txBody>
@@ -8383,7 +8490,7 @@
         </p:nvSpPr>
         <p:spPr>
           <a:xfrm>
-            <a:off x="548640" y="2962656"/>
+            <a:off x="548640" y="3145536"/>
             <a:ext cx="347472" cy="347472"/>
           </a:xfrm>
           <a:prstGeom prst="ellipse">
@@ -8436,8 +8543,8 @@
         </p:nvSpPr>
         <p:spPr>
           <a:xfrm>
-            <a:off x="1051560" y="2980944"/>
-            <a:ext cx="5257800" cy="502920"/>
+            <a:off x="1051560" y="3163824"/>
+            <a:ext cx="5349240" cy="502920"/>
           </a:xfrm>
           <a:prstGeom prst="rect">
             <a:avLst/>
@@ -8462,7 +8569,7 @@
                 </a:solidFill>
                 <a:latin typeface="Calibri"/>
               </a:rPr>
-              <a:t>Ordénalas: </a:t>
+              <a:t>En </a:t>
             </a:r>
             <a:r>
               <a:rPr sz="1500" b="1" i="0">
@@ -8471,7 +8578,7 @@
                 </a:solidFill>
                 <a:latin typeface="Calibri"/>
               </a:rPr>
-              <a:t>01_Menu</a:t>
+              <a:t>Categoria</a:t>
             </a:r>
             <a:r>
               <a:rPr sz="1500" b="0" i="0">
@@ -8480,7 +8587,7 @@
                 </a:solidFill>
                 <a:latin typeface="Calibri"/>
               </a:rPr>
-              <a:t> arriba, con el número 0.</a:t>
+              <a:t> elige Fina (colorear, camino y runner) o Gruesa (la zona).</a:t>
             </a:r>
           </a:p>
         </p:txBody>
@@ -8493,7 +8600,7 @@
         </p:nvSpPr>
         <p:spPr>
           <a:xfrm>
-            <a:off x="548640" y="3621024"/>
+            <a:off x="548640" y="3895344"/>
             <a:ext cx="347472" cy="347472"/>
           </a:xfrm>
           <a:prstGeom prst="ellipse">
@@ -8546,8 +8653,8 @@
         </p:nvSpPr>
         <p:spPr>
           <a:xfrm>
-            <a:off x="1051560" y="3639312"/>
-            <a:ext cx="5257800" cy="502920"/>
+            <a:off x="1051560" y="3913631"/>
+            <a:ext cx="5349240" cy="502920"/>
           </a:xfrm>
           <a:prstGeom prst="rect">
             <a:avLst/>
@@ -8572,7 +8679,43 @@
                 </a:solidFill>
                 <a:latin typeface="Calibri"/>
               </a:rPr>
-              <a:t>Cierra la ventana. No hace falta pulsar Build todavía.</a:t>
+              <a:t>En 12_Runner marca </a:t>
+            </a:r>
+            <a:r>
+              <a:rPr sz="1500" b="1" i="0">
+                <a:solidFill>
+                  <a:srgbClr val="0A0E1A"/>
+                </a:solidFill>
+                <a:latin typeface="Calibri"/>
+              </a:rPr>
+              <a:t>Agregar Genero</a:t>
+            </a:r>
+            <a:r>
+              <a:rPr sz="1500" b="0" i="0">
+                <a:solidFill>
+                  <a:srgbClr val="0A0E1A"/>
+                </a:solidFill>
+                <a:latin typeface="Calibri"/>
+              </a:rPr>
+              <a:t>. En 20_Grueso marca </a:t>
+            </a:r>
+            <a:r>
+              <a:rPr sz="1500" b="1" i="0">
+                <a:solidFill>
+                  <a:srgbClr val="0A0E1A"/>
+                </a:solidFill>
+                <a:latin typeface="Calibri"/>
+              </a:rPr>
+              <a:t>Agregar Mundo</a:t>
+            </a:r>
+            <a:r>
+              <a:rPr sz="1500" b="0" i="0">
+                <a:solidFill>
+                  <a:srgbClr val="0A0E1A"/>
+                </a:solidFill>
+                <a:latin typeface="Calibri"/>
+              </a:rPr>
+              <a:t>.</a:t>
             </a:r>
           </a:p>
         </p:txBody>
@@ -8585,7 +8728,7 @@
         </p:nvSpPr>
         <p:spPr>
           <a:xfrm>
-            <a:off x="548640" y="4279392"/>
+            <a:off x="548640" y="4645152"/>
             <a:ext cx="347472" cy="347472"/>
           </a:xfrm>
           <a:prstGeom prst="ellipse">
@@ -8638,8 +8781,8 @@
         </p:nvSpPr>
         <p:spPr>
           <a:xfrm>
-            <a:off x="1051560" y="4297679"/>
-            <a:ext cx="5257800" cy="502920"/>
+            <a:off x="1051560" y="4663440"/>
+            <a:ext cx="5349240" cy="502920"/>
           </a:xfrm>
           <a:prstGeom prst="rect">
             <a:avLst/>
@@ -8664,7 +8807,25 @@
                 </a:solidFill>
                 <a:latin typeface="Calibri"/>
               </a:rPr>
-              <a:t>Abre 01_Menu y dale Play: juega los cuatro caminos de punta a punta.</a:t>
+              <a:t>Dale Play y pulsa </a:t>
+            </a:r>
+            <a:r>
+              <a:rPr sz="1500" b="1" i="0">
+                <a:solidFill>
+                  <a:srgbClr val="0A0E1A"/>
+                </a:solidFill>
+                <a:latin typeface="Calibri"/>
+              </a:rPr>
+              <a:t>Esc</a:t>
+            </a:r>
+            <a:r>
+              <a:rPr sz="1500" b="0" i="0">
+                <a:solidFill>
+                  <a:srgbClr val="0A0E1A"/>
+                </a:solidFill>
+                <a:latin typeface="Calibri"/>
+              </a:rPr>
+              <a:t>: sale el menú. Continuar cuenta 3, 2, 1.</a:t>
             </a:r>
           </a:p>
         </p:txBody>
@@ -8677,16 +8838,16 @@
         </p:nvSpPr>
         <p:spPr>
           <a:xfrm>
-            <a:off x="548640" y="5074920"/>
-            <a:ext cx="5760720" cy="1143000"/>
+            <a:off x="6684264" y="1609344"/>
+            <a:ext cx="5010912" cy="2850642"/>
           </a:xfrm>
           <a:prstGeom prst="roundRect">
             <a:avLst>
-              <a:gd name="adj" fmla="val 5000"/>
+              <a:gd name="adj" fmla="val 3000"/>
             </a:avLst>
           </a:prstGeom>
           <a:solidFill>
-            <a:srgbClr val="0F1424"/>
+            <a:srgbClr val="070B18"/>
           </a:solidFill>
           <a:ln>
             <a:noFill/>
@@ -8713,16 +8874,40 @@
           <a:p/>
         </p:txBody>
       </p:sp>
-      <p:sp>
-        <p:nvSpPr>
-          <p:cNvPr id="15" name="TextBox 14"/>
+      <p:pic>
+        <p:nvPicPr>
+          <p:cNvPr id="15" name="Picture 14" descr="m12_pausa.png"/>
+          <p:cNvPicPr>
+            <a:picLocks noChangeAspect="1"/>
+          </p:cNvPicPr>
+          <p:nvPr/>
+        </p:nvPicPr>
+        <p:blipFill>
+          <a:blip r:embed="rId2"/>
+          <a:stretch>
+            <a:fillRect/>
+          </a:stretch>
+        </p:blipFill>
+        <p:spPr>
+          <a:xfrm>
+            <a:off x="6720840" y="1645920"/>
+            <a:ext cx="4937760" cy="2777490"/>
+          </a:xfrm>
+          <a:prstGeom prst="rect">
+            <a:avLst/>
+          </a:prstGeom>
+        </p:spPr>
+      </p:pic>
+      <p:sp>
+        <p:nvSpPr>
+          <p:cNvPr id="16" name="TextBox 15"/>
           <p:cNvSpPr txBox="1"/>
           <p:nvPr/>
         </p:nvSpPr>
         <p:spPr>
           <a:xfrm>
-            <a:off x="777240" y="5257800"/>
-            <a:ext cx="5303520" cy="868680"/>
+            <a:off x="6720840" y="4533138"/>
+            <a:ext cx="4937760" cy="320040"/>
           </a:xfrm>
           <a:prstGeom prst="rect">
             <a:avLst/>
@@ -8737,60 +8922,42 @@
           <a:p>
             <a:pPr algn="l">
               <a:spcAft>
-                <a:spcPts val="200"/>
-              </a:spcAft>
-            </a:pPr>
-            <a:r>
-              <a:rPr sz="1300" b="0" i="0">
-                <a:solidFill>
-                  <a:srgbClr val="E9EEFB"/>
-                </a:solidFill>
-                <a:latin typeface="Consolas"/>
-              </a:rPr>
-              <a:t>Scene '12_Runner' couldn't be loaded because it has</a:t>
-            </a:r>
-          </a:p>
-          <a:p>
-            <a:pPr algn="l">
-              <a:spcAft>
-                <a:spcPts val="200"/>
-              </a:spcAft>
-            </a:pPr>
-            <a:r>
-              <a:rPr sz="1300" b="0" i="0">
-                <a:solidFill>
-                  <a:srgbClr val="E9EEFB"/>
-                </a:solidFill>
-                <a:latin typeface="Consolas"/>
-              </a:rPr>
-              <a:t>not been added to the build settings</a:t>
-            </a:r>
-          </a:p>
-        </p:txBody>
-      </p:sp>
-      <p:sp>
-        <p:nvSpPr>
-          <p:cNvPr id="16" name="Rounded Rectangle 15"/>
+                <a:spcPts val="600"/>
+              </a:spcAft>
+            </a:pPr>
+            <a:r>
+              <a:rPr sz="1200" b="0" i="0">
+                <a:solidFill>
+                  <a:srgbClr val="4F5C75"/>
+                </a:solidFill>
+                <a:latin typeface="Calibri"/>
+              </a:rPr>
+              <a:t>La pausa del runner, con el color de la categoría fina.</a:t>
+            </a:r>
+          </a:p>
+        </p:txBody>
+      </p:sp>
+      <p:sp>
+        <p:nvSpPr>
+          <p:cNvPr id="17" name="Rounded Rectangle 16"/>
           <p:cNvSpPr/>
           <p:nvPr/>
         </p:nvSpPr>
         <p:spPr>
           <a:xfrm>
-            <a:off x="6675120" y="1645920"/>
-            <a:ext cx="4983480" cy="4572000"/>
+            <a:off x="6720840" y="4926330"/>
+            <a:ext cx="4937760" cy="1371600"/>
           </a:xfrm>
           <a:prstGeom prst="roundRect">
             <a:avLst>
-              <a:gd name="adj" fmla="val 6000"/>
+              <a:gd name="adj" fmla="val 8000"/>
             </a:avLst>
           </a:prstGeom>
           <a:solidFill>
-            <a:srgbClr val="FFFFFF"/>
+            <a:srgbClr val="E3F4EA"/>
           </a:solidFill>
-          <a:ln w="12700">
-            <a:solidFill>
-              <a:srgbClr val="D2DAE9"/>
-            </a:solidFill>
+          <a:ln>
+            <a:noFill/>
           </a:ln>
           <a:effectLst/>
         </p:spPr>
@@ -8816,14 +8983,14 @@
       </p:sp>
       <p:sp>
         <p:nvSpPr>
-          <p:cNvPr id="17" name="TextBox 16"/>
+          <p:cNvPr id="18" name="TextBox 17"/>
           <p:cNvSpPr txBox="1"/>
           <p:nvPr/>
         </p:nvSpPr>
         <p:spPr>
           <a:xfrm>
-            <a:off x="6903720" y="1783080"/>
-            <a:ext cx="4572000" cy="365760"/>
+            <a:off x="6949440" y="5090922"/>
+            <a:ext cx="4480560" cy="1097280"/>
           </a:xfrm>
           <a:prstGeom prst="rect">
             <a:avLst/>
@@ -8838,31 +9005,91 @@
           <a:p>
             <a:pPr algn="l">
               <a:spcAft>
-                <a:spcPts val="600"/>
-              </a:spcAft>
-            </a:pPr>
-            <a:r>
-              <a:rPr sz="1700" b="1" i="0">
-                <a:solidFill>
-                  <a:srgbClr val="0A0E1A"/>
-                </a:solidFill>
-                <a:latin typeface="Calibri"/>
-              </a:rPr>
-              <a:t>La prueba completa</a:t>
-            </a:r>
-          </a:p>
-        </p:txBody>
-      </p:sp>
-      <p:sp>
-        <p:nvSpPr>
-          <p:cNvPr id="18" name="TextBox 17"/>
+                <a:spcPts val="400"/>
+              </a:spcAft>
+            </a:pPr>
+            <a:r>
+              <a:rPr sz="1300" b="1" i="0">
+                <a:solidFill>
+                  <a:srgbClr val="097A41"/>
+                </a:solidFill>
+                <a:latin typeface="Calibri"/>
+              </a:rPr>
+              <a:t>✓  Cómo sabes que quedó</a:t>
+            </a:r>
+          </a:p>
+          <a:p>
+            <a:pPr algn="l">
+              <a:spcAft>
+                <a:spcPts val="400"/>
+              </a:spcAft>
+            </a:pPr>
+            <a:r>
+              <a:rPr sz="1300" b="0" i="0">
+                <a:solidFill>
+                  <a:srgbClr val="0A0E1A"/>
+                </a:solidFill>
+                <a:latin typeface="Calibri"/>
+              </a:rPr>
+              <a:t>Arriba a la derecha aparece el botón de pausa, y Esc abre el menú con la categoría y el juego.</a:t>
+            </a:r>
+          </a:p>
+        </p:txBody>
+      </p:sp>
+      <p:sp>
+        <p:nvSpPr>
+          <p:cNvPr id="19" name="Rounded Rectangle 18"/>
+          <p:cNvSpPr/>
+          <p:nvPr/>
+        </p:nvSpPr>
+        <p:spPr>
+          <a:xfrm>
+            <a:off x="548640" y="5486400"/>
+            <a:ext cx="5852160" cy="822960"/>
+          </a:xfrm>
+          <a:prstGeom prst="roundRect">
+            <a:avLst>
+              <a:gd name="adj" fmla="val 8000"/>
+            </a:avLst>
+          </a:prstGeom>
+          <a:solidFill>
+            <a:srgbClr val="FCF1DC"/>
+          </a:solidFill>
+          <a:ln>
+            <a:noFill/>
+          </a:ln>
+          <a:effectLst/>
+        </p:spPr>
+        <p:style>
+          <a:lnRef idx="1">
+            <a:schemeClr val="accent1"/>
+          </a:lnRef>
+          <a:fillRef idx="3">
+            <a:schemeClr val="accent1"/>
+          </a:fillRef>
+          <a:effectRef idx="2">
+            <a:schemeClr val="accent1"/>
+          </a:effectRef>
+          <a:fontRef idx="minor">
+            <a:schemeClr val="lt1"/>
+          </a:fontRef>
+        </p:style>
+        <p:txBody>
+          <a:bodyPr rtlCol="0" anchor="ctr"/>
+          <a:lstStyle/>
+          <a:p/>
+        </p:txBody>
+      </p:sp>
+      <p:sp>
+        <p:nvSpPr>
+          <p:cNvPr id="20" name="TextBox 19"/>
           <p:cNvSpPr txBox="1"/>
           <p:nvPr/>
         </p:nvSpPr>
         <p:spPr>
           <a:xfrm>
-            <a:off x="6903720" y="2286000"/>
-            <a:ext cx="4572000" cy="548640"/>
+            <a:off x="777240" y="5650992"/>
+            <a:ext cx="5394960" cy="548640"/>
           </a:xfrm>
           <a:prstGeom prst="rect">
             <a:avLst/>
@@ -8877,40 +9104,47 @@
           <a:p>
             <a:pPr algn="l">
               <a:spcAft>
-                <a:spcPts val="600"/>
-              </a:spcAft>
-            </a:pPr>
-            <a:r>
-              <a:rPr sz="1600" b="0" i="0">
-                <a:solidFill>
-                  <a:srgbClr val="7317C9"/>
-                </a:solidFill>
-                <a:latin typeface="Calibri"/>
-              </a:rPr>
-              <a:t>☐  </a:t>
-            </a:r>
-            <a:r>
-              <a:rPr sz="1400" b="0" i="0">
-                <a:solidFill>
-                  <a:srgbClr val="0A0E1A"/>
-                </a:solidFill>
-                <a:latin typeface="Calibri"/>
-              </a:rPr>
-              <a:t>Menú: mano derecha, luego Colorear.</a:t>
-            </a:r>
-          </a:p>
-        </p:txBody>
-      </p:sp>
-      <p:sp>
-        <p:nvSpPr>
-          <p:cNvPr id="19" name="TextBox 18"/>
+                <a:spcPts val="400"/>
+              </a:spcAft>
+            </a:pPr>
+            <a:r>
+              <a:rPr sz="1300" b="1" i="0">
+                <a:solidFill>
+                  <a:srgbClr val="875A00"/>
+                </a:solidFill>
+                <a:latin typeface="Calibri"/>
+              </a:rPr>
+              <a:t>!  No hay nada más que conectar</a:t>
+            </a:r>
+          </a:p>
+          <a:p>
+            <a:pPr algn="l">
+              <a:spcAft>
+                <a:spcPts val="400"/>
+              </a:spcAft>
+            </a:pPr>
+            <a:r>
+              <a:rPr sz="1300" b="0" i="0">
+                <a:solidFill>
+                  <a:srgbClr val="0A0E1A"/>
+                </a:solidFill>
+                <a:latin typeface="Calibri"/>
+              </a:rPr>
+              <a:t>El prefab ya trae sus botones y sus sonidos: no se toca On Click.</a:t>
+            </a:r>
+          </a:p>
+        </p:txBody>
+      </p:sp>
+      <p:sp>
+        <p:nvSpPr>
+          <p:cNvPr id="21" name="Pie"/>
           <p:cNvSpPr txBox="1"/>
           <p:nvPr/>
         </p:nvSpPr>
         <p:spPr>
           <a:xfrm>
-            <a:off x="6903720" y="2907792"/>
-            <a:ext cx="4572000" cy="548640"/>
+            <a:off x="548640" y="6400800"/>
+            <a:ext cx="11064240" cy="274320"/>
           </a:xfrm>
           <a:prstGeom prst="rect">
             <a:avLst/>
@@ -8923,259 +9157,19 @@
           </a:bodyPr>
           <a:lstStyle/>
           <a:p>
-            <a:pPr algn="l">
+            <a:pPr algn="r">
               <a:spcAft>
                 <a:spcPts val="600"/>
               </a:spcAft>
             </a:pPr>
             <a:r>
-              <a:rPr sz="1600" b="0" i="0">
-                <a:solidFill>
-                  <a:srgbClr val="7317C9"/>
-                </a:solidFill>
-                <a:latin typeface="Calibri"/>
-              </a:rPr>
-              <a:t>☐  </a:t>
-            </a:r>
-            <a:r>
-              <a:rPr sz="1400" b="0" i="0">
-                <a:solidFill>
-                  <a:srgbClr val="0A0E1A"/>
-                </a:solidFill>
-                <a:latin typeface="Calibri"/>
-              </a:rPr>
-              <a:t>Colorear: pinta, elige otro color, pulsa Listo.</a:t>
-            </a:r>
-          </a:p>
-        </p:txBody>
-      </p:sp>
-      <p:sp>
-        <p:nvSpPr>
-          <p:cNvPr id="20" name="TextBox 19"/>
-          <p:cNvSpPr txBox="1"/>
-          <p:nvPr/>
-        </p:nvSpPr>
-        <p:spPr>
-          <a:xfrm>
-            <a:off x="6903720" y="3529584"/>
-            <a:ext cx="4572000" cy="548640"/>
-          </a:xfrm>
-          <a:prstGeom prst="rect">
-            <a:avLst/>
-          </a:prstGeom>
-          <a:noFill/>
-        </p:spPr>
-        <p:txBody>
-          <a:bodyPr wrap="square" lIns="0" rIns="0" tIns="0" bIns="0" anchor="t">
-            <a:spAutoFit/>
-          </a:bodyPr>
-          <a:lstStyle/>
-          <a:p>
-            <a:pPr algn="l">
-              <a:spcAft>
-                <a:spcPts val="600"/>
-              </a:spcAft>
-            </a:pPr>
-            <a:r>
-              <a:rPr sz="1600" b="0" i="0">
-                <a:solidFill>
-                  <a:srgbClr val="7317C9"/>
-                </a:solidFill>
-                <a:latin typeface="Calibri"/>
-              </a:rPr>
-              <a:t>☐  </a:t>
-            </a:r>
-            <a:r>
-              <a:rPr sz="1400" b="0" i="0">
-                <a:solidFill>
-                  <a:srgbClr val="0A0E1A"/>
-                </a:solidFill>
-                <a:latin typeface="Calibri"/>
-              </a:rPr>
-              <a:t>Runner: tu personaje esquiva hasta el final.</a:t>
-            </a:r>
-          </a:p>
-        </p:txBody>
-      </p:sp>
-      <p:sp>
-        <p:nvSpPr>
-          <p:cNvPr id="21" name="TextBox 20"/>
-          <p:cNvSpPr txBox="1"/>
-          <p:nvPr/>
-        </p:nvSpPr>
-        <p:spPr>
-          <a:xfrm>
-            <a:off x="6903720" y="4151376"/>
-            <a:ext cx="4572000" cy="548640"/>
-          </a:xfrm>
-          <a:prstGeom prst="rect">
-            <a:avLst/>
-          </a:prstGeom>
-          <a:noFill/>
-        </p:spPr>
-        <p:txBody>
-          <a:bodyPr wrap="square" lIns="0" rIns="0" tIns="0" bIns="0" anchor="t">
-            <a:spAutoFit/>
-          </a:bodyPr>
-          <a:lstStyle/>
-          <a:p>
-            <a:pPr algn="l">
-              <a:spcAft>
-                <a:spcPts val="600"/>
-              </a:spcAft>
-            </a:pPr>
-            <a:r>
-              <a:rPr sz="1600" b="0" i="0">
-                <a:solidFill>
-                  <a:srgbClr val="7317C9"/>
-                </a:solidFill>
-                <a:latin typeface="Calibri"/>
-              </a:rPr>
-              <a:t>☐  </a:t>
-            </a:r>
-            <a:r>
-              <a:rPr sz="1400" b="0" i="0">
-                <a:solidFill>
-                  <a:srgbClr val="0A0E1A"/>
-                </a:solidFill>
-                <a:latin typeface="Calibri"/>
-              </a:rPr>
-              <a:t>Otra vez desde el menú: Camino.</a:t>
-            </a:r>
-          </a:p>
-        </p:txBody>
-      </p:sp>
-      <p:sp>
-        <p:nvSpPr>
-          <p:cNvPr id="22" name="TextBox 21"/>
-          <p:cNvSpPr txBox="1"/>
-          <p:nvPr/>
-        </p:nvSpPr>
-        <p:spPr>
-          <a:xfrm>
-            <a:off x="6903720" y="4773168"/>
-            <a:ext cx="4572000" cy="548640"/>
-          </a:xfrm>
-          <a:prstGeom prst="rect">
-            <a:avLst/>
-          </a:prstGeom>
-          <a:noFill/>
-        </p:spPr>
-        <p:txBody>
-          <a:bodyPr wrap="square" lIns="0" rIns="0" tIns="0" bIns="0" anchor="t">
-            <a:spAutoFit/>
-          </a:bodyPr>
-          <a:lstStyle/>
-          <a:p>
-            <a:pPr algn="l">
-              <a:spcAft>
-                <a:spcPts val="600"/>
-              </a:spcAft>
-            </a:pPr>
-            <a:r>
-              <a:rPr sz="1600" b="0" i="0">
-                <a:solidFill>
-                  <a:srgbClr val="7317C9"/>
-                </a:solidFill>
-                <a:latin typeface="Calibri"/>
-              </a:rPr>
-              <a:t>☐  </a:t>
-            </a:r>
-            <a:r>
-              <a:rPr sz="1400" b="0" i="0">
-                <a:solidFill>
-                  <a:srgbClr val="0A0E1A"/>
-                </a:solidFill>
-                <a:latin typeface="Calibri"/>
-              </a:rPr>
-              <a:t>Y por último un mundo del Grueso.</a:t>
-            </a:r>
-          </a:p>
-        </p:txBody>
-      </p:sp>
-      <p:sp>
-        <p:nvSpPr>
-          <p:cNvPr id="23" name="TextBox 22"/>
-          <p:cNvSpPr txBox="1"/>
-          <p:nvPr/>
-        </p:nvSpPr>
-        <p:spPr>
-          <a:xfrm>
-            <a:off x="6903720" y="5394960"/>
-            <a:ext cx="4572000" cy="548640"/>
-          </a:xfrm>
-          <a:prstGeom prst="rect">
-            <a:avLst/>
-          </a:prstGeom>
-          <a:noFill/>
-        </p:spPr>
-        <p:txBody>
-          <a:bodyPr wrap="square" lIns="0" rIns="0" tIns="0" bIns="0" anchor="t">
-            <a:spAutoFit/>
-          </a:bodyPr>
-          <a:lstStyle/>
-          <a:p>
-            <a:pPr algn="l">
-              <a:spcAft>
-                <a:spcPts val="600"/>
-              </a:spcAft>
-            </a:pPr>
-            <a:r>
-              <a:rPr sz="1600" b="0" i="0">
-                <a:solidFill>
-                  <a:srgbClr val="7317C9"/>
-                </a:solidFill>
-                <a:latin typeface="Calibri"/>
-              </a:rPr>
-              <a:t>☐  </a:t>
-            </a:r>
-            <a:r>
-              <a:rPr sz="1400" b="0" i="0">
-                <a:solidFill>
-                  <a:srgbClr val="0A0E1A"/>
-                </a:solidFill>
-                <a:latin typeface="Calibri"/>
-              </a:rPr>
-              <a:t>Repite con la mano izquierda.</a:t>
-            </a:r>
-          </a:p>
-        </p:txBody>
-      </p:sp>
-      <p:sp>
-        <p:nvSpPr>
-          <p:cNvPr id="24" name="Pie"/>
-          <p:cNvSpPr txBox="1"/>
-          <p:nvPr/>
-        </p:nvSpPr>
-        <p:spPr>
-          <a:xfrm>
-            <a:off x="548640" y="6400800"/>
-            <a:ext cx="11064240" cy="274320"/>
-          </a:xfrm>
-          <a:prstGeom prst="rect">
-            <a:avLst/>
-          </a:prstGeom>
-          <a:noFill/>
-        </p:spPr>
-        <p:txBody>
-          <a:bodyPr wrap="square" lIns="0" rIns="0" tIns="0" bIns="0" anchor="t">
-            <a:spAutoFit/>
-          </a:bodyPr>
-          <a:lstStyle/>
-          <a:p>
-            <a:pPr algn="r">
-              <a:spcAft>
-                <a:spcPts val="600"/>
-              </a:spcAft>
-            </a:pPr>
-            <a:r>
               <a:rPr sz="1100" b="0" i="0">
                 <a:solidFill>
                   <a:srgbClr val="4F5C75"/>
                 </a:solidFill>
                 <a:latin typeface="Calibri"/>
               </a:rPr>
-              <a:t>Guía 1 · Motricidad  ·  13 de 16</a:t>
+              <a:t>Guía 1 · Motricidad  ·  13 de 17</a:t>
             </a:r>
           </a:p>
         </p:txBody>
@@ -9279,21 +9273,74 @@
                 </a:solidFill>
                 <a:latin typeface="Cambria"/>
               </a:rPr>
-              <a:t>Los datos que deja cada partida</a:t>
-            </a:r>
-          </a:p>
-        </p:txBody>
-      </p:sp>
-      <p:sp>
-        <p:nvSpPr>
-          <p:cNvPr id="4" name="TextBox 3"/>
+              <a:t>Build Settings: la lista que conecta las escenas</a:t>
+            </a:r>
+          </a:p>
+        </p:txBody>
+      </p:sp>
+      <p:sp>
+        <p:nvSpPr>
+          <p:cNvPr id="4" name="Oval 3"/>
+          <p:cNvSpPr/>
+          <p:nvPr/>
+        </p:nvSpPr>
+        <p:spPr>
+          <a:xfrm>
+            <a:off x="548640" y="1645920"/>
+            <a:ext cx="347472" cy="347472"/>
+          </a:xfrm>
+          <a:prstGeom prst="ellipse">
+            <a:avLst/>
+          </a:prstGeom>
+          <a:solidFill>
+            <a:srgbClr val="7317C9"/>
+          </a:solidFill>
+          <a:ln>
+            <a:noFill/>
+          </a:ln>
+          <a:effectLst/>
+        </p:spPr>
+        <p:style>
+          <a:lnRef idx="1">
+            <a:schemeClr val="accent1"/>
+          </a:lnRef>
+          <a:fillRef idx="3">
+            <a:schemeClr val="accent1"/>
+          </a:fillRef>
+          <a:effectRef idx="2">
+            <a:schemeClr val="accent1"/>
+          </a:effectRef>
+          <a:fontRef idx="minor">
+            <a:schemeClr val="lt1"/>
+          </a:fontRef>
+        </p:style>
+        <p:txBody>
+          <a:bodyPr rtlCol="0" anchor="ctr" lIns="0" rIns="0" tIns="0" bIns="0"/>
+          <a:lstStyle/>
+          <a:p>
+            <a:pPr algn="ctr"/>
+            <a:r>
+              <a:rPr sz="1300" b="1">
+                <a:solidFill>
+                  <a:srgbClr val="FFFFFF"/>
+                </a:solidFill>
+                <a:latin typeface="Calibri"/>
+              </a:rPr>
+              <a:t>1</a:t>
+            </a:r>
+          </a:p>
+        </p:txBody>
+      </p:sp>
+      <p:sp>
+        <p:nvSpPr>
+          <p:cNvPr id="5" name="TextBox 4"/>
           <p:cNvSpPr txBox="1"/>
           <p:nvPr/>
         </p:nvSpPr>
         <p:spPr>
           <a:xfrm>
-            <a:off x="548640" y="1645920"/>
-            <a:ext cx="11064240" cy="731520"/>
+            <a:off x="1051560" y="1664208"/>
+            <a:ext cx="5257800" cy="502920"/>
           </a:xfrm>
           <a:prstGeom prst="rect">
             <a:avLst/>
@@ -9312,27 +9359,413 @@
               </a:spcAft>
             </a:pPr>
             <a:r>
+              <a:rPr sz="1500" b="1" i="0">
+                <a:solidFill>
+                  <a:srgbClr val="0A0E1A"/>
+                </a:solidFill>
+                <a:latin typeface="Calibri"/>
+              </a:rPr>
+              <a:t>File &gt; Build Settings...</a:t>
+            </a:r>
+          </a:p>
+        </p:txBody>
+      </p:sp>
+      <p:sp>
+        <p:nvSpPr>
+          <p:cNvPr id="6" name="Oval 5"/>
+          <p:cNvSpPr/>
+          <p:nvPr/>
+        </p:nvSpPr>
+        <p:spPr>
+          <a:xfrm>
+            <a:off x="548640" y="2304288"/>
+            <a:ext cx="347472" cy="347472"/>
+          </a:xfrm>
+          <a:prstGeom prst="ellipse">
+            <a:avLst/>
+          </a:prstGeom>
+          <a:solidFill>
+            <a:srgbClr val="7317C9"/>
+          </a:solidFill>
+          <a:ln>
+            <a:noFill/>
+          </a:ln>
+          <a:effectLst/>
+        </p:spPr>
+        <p:style>
+          <a:lnRef idx="1">
+            <a:schemeClr val="accent1"/>
+          </a:lnRef>
+          <a:fillRef idx="3">
+            <a:schemeClr val="accent1"/>
+          </a:fillRef>
+          <a:effectRef idx="2">
+            <a:schemeClr val="accent1"/>
+          </a:effectRef>
+          <a:fontRef idx="minor">
+            <a:schemeClr val="lt1"/>
+          </a:fontRef>
+        </p:style>
+        <p:txBody>
+          <a:bodyPr rtlCol="0" anchor="ctr" lIns="0" rIns="0" tIns="0" bIns="0"/>
+          <a:lstStyle/>
+          <a:p>
+            <a:pPr algn="ctr"/>
+            <a:r>
+              <a:rPr sz="1300" b="1">
+                <a:solidFill>
+                  <a:srgbClr val="FFFFFF"/>
+                </a:solidFill>
+                <a:latin typeface="Calibri"/>
+              </a:rPr>
+              <a:t>2</a:t>
+            </a:r>
+          </a:p>
+        </p:txBody>
+      </p:sp>
+      <p:sp>
+        <p:nvSpPr>
+          <p:cNvPr id="7" name="TextBox 6"/>
+          <p:cNvSpPr txBox="1"/>
+          <p:nvPr/>
+        </p:nvSpPr>
+        <p:spPr>
+          <a:xfrm>
+            <a:off x="1051560" y="2322576"/>
+            <a:ext cx="5257800" cy="502920"/>
+          </a:xfrm>
+          <a:prstGeom prst="rect">
+            <a:avLst/>
+          </a:prstGeom>
+          <a:noFill/>
+        </p:spPr>
+        <p:txBody>
+          <a:bodyPr wrap="square" lIns="0" rIns="0" tIns="0" bIns="0" anchor="t">
+            <a:spAutoFit/>
+          </a:bodyPr>
+          <a:lstStyle/>
+          <a:p>
+            <a:pPr algn="l">
+              <a:spcAft>
+                <a:spcPts val="600"/>
+              </a:spcAft>
+            </a:pPr>
+            <a:r>
               <a:rPr sz="1500" b="0" i="0">
                 <a:solidFill>
                   <a:srgbClr val="0A0E1A"/>
                 </a:solidFill>
                 <a:latin typeface="Calibri"/>
               </a:rPr>
-              <a:t>Cada juego escribe un archivo CSV con una fila por partida. Esta fila es real: la dejó el juego de referencia el 21 de octubre.</a:t>
-            </a:r>
-          </a:p>
-        </p:txBody>
-      </p:sp>
-      <p:sp>
-        <p:nvSpPr>
-          <p:cNvPr id="5" name="Rounded Rectangle 4"/>
+              <a:t>Arrastra las cinco escenas desde Project a la lista Scenes In Build.</a:t>
+            </a:r>
+          </a:p>
+        </p:txBody>
+      </p:sp>
+      <p:sp>
+        <p:nvSpPr>
+          <p:cNvPr id="8" name="Oval 7"/>
           <p:cNvSpPr/>
           <p:nvPr/>
         </p:nvSpPr>
         <p:spPr>
           <a:xfrm>
-            <a:off x="548640" y="2377440"/>
-            <a:ext cx="11109960" cy="1143000"/>
+            <a:off x="548640" y="2962656"/>
+            <a:ext cx="347472" cy="347472"/>
+          </a:xfrm>
+          <a:prstGeom prst="ellipse">
+            <a:avLst/>
+          </a:prstGeom>
+          <a:solidFill>
+            <a:srgbClr val="7317C9"/>
+          </a:solidFill>
+          <a:ln>
+            <a:noFill/>
+          </a:ln>
+          <a:effectLst/>
+        </p:spPr>
+        <p:style>
+          <a:lnRef idx="1">
+            <a:schemeClr val="accent1"/>
+          </a:lnRef>
+          <a:fillRef idx="3">
+            <a:schemeClr val="accent1"/>
+          </a:fillRef>
+          <a:effectRef idx="2">
+            <a:schemeClr val="accent1"/>
+          </a:effectRef>
+          <a:fontRef idx="minor">
+            <a:schemeClr val="lt1"/>
+          </a:fontRef>
+        </p:style>
+        <p:txBody>
+          <a:bodyPr rtlCol="0" anchor="ctr" lIns="0" rIns="0" tIns="0" bIns="0"/>
+          <a:lstStyle/>
+          <a:p>
+            <a:pPr algn="ctr"/>
+            <a:r>
+              <a:rPr sz="1300" b="1">
+                <a:solidFill>
+                  <a:srgbClr val="FFFFFF"/>
+                </a:solidFill>
+                <a:latin typeface="Calibri"/>
+              </a:rPr>
+              <a:t>3</a:t>
+            </a:r>
+          </a:p>
+        </p:txBody>
+      </p:sp>
+      <p:sp>
+        <p:nvSpPr>
+          <p:cNvPr id="9" name="TextBox 8"/>
+          <p:cNvSpPr txBox="1"/>
+          <p:nvPr/>
+        </p:nvSpPr>
+        <p:spPr>
+          <a:xfrm>
+            <a:off x="1051560" y="2980944"/>
+            <a:ext cx="5257800" cy="502920"/>
+          </a:xfrm>
+          <a:prstGeom prst="rect">
+            <a:avLst/>
+          </a:prstGeom>
+          <a:noFill/>
+        </p:spPr>
+        <p:txBody>
+          <a:bodyPr wrap="square" lIns="0" rIns="0" tIns="0" bIns="0" anchor="t">
+            <a:spAutoFit/>
+          </a:bodyPr>
+          <a:lstStyle/>
+          <a:p>
+            <a:pPr algn="l">
+              <a:spcAft>
+                <a:spcPts val="600"/>
+              </a:spcAft>
+            </a:pPr>
+            <a:r>
+              <a:rPr sz="1500" b="0" i="0">
+                <a:solidFill>
+                  <a:srgbClr val="0A0E1A"/>
+                </a:solidFill>
+                <a:latin typeface="Calibri"/>
+              </a:rPr>
+              <a:t>Ordénalas: </a:t>
+            </a:r>
+            <a:r>
+              <a:rPr sz="1500" b="1" i="0">
+                <a:solidFill>
+                  <a:srgbClr val="0A0E1A"/>
+                </a:solidFill>
+                <a:latin typeface="Calibri"/>
+              </a:rPr>
+              <a:t>01_Menu</a:t>
+            </a:r>
+            <a:r>
+              <a:rPr sz="1500" b="0" i="0">
+                <a:solidFill>
+                  <a:srgbClr val="0A0E1A"/>
+                </a:solidFill>
+                <a:latin typeface="Calibri"/>
+              </a:rPr>
+              <a:t> arriba, con el número 0.</a:t>
+            </a:r>
+          </a:p>
+        </p:txBody>
+      </p:sp>
+      <p:sp>
+        <p:nvSpPr>
+          <p:cNvPr id="10" name="Oval 9"/>
+          <p:cNvSpPr/>
+          <p:nvPr/>
+        </p:nvSpPr>
+        <p:spPr>
+          <a:xfrm>
+            <a:off x="548640" y="3621024"/>
+            <a:ext cx="347472" cy="347472"/>
+          </a:xfrm>
+          <a:prstGeom prst="ellipse">
+            <a:avLst/>
+          </a:prstGeom>
+          <a:solidFill>
+            <a:srgbClr val="7317C9"/>
+          </a:solidFill>
+          <a:ln>
+            <a:noFill/>
+          </a:ln>
+          <a:effectLst/>
+        </p:spPr>
+        <p:style>
+          <a:lnRef idx="1">
+            <a:schemeClr val="accent1"/>
+          </a:lnRef>
+          <a:fillRef idx="3">
+            <a:schemeClr val="accent1"/>
+          </a:fillRef>
+          <a:effectRef idx="2">
+            <a:schemeClr val="accent1"/>
+          </a:effectRef>
+          <a:fontRef idx="minor">
+            <a:schemeClr val="lt1"/>
+          </a:fontRef>
+        </p:style>
+        <p:txBody>
+          <a:bodyPr rtlCol="0" anchor="ctr" lIns="0" rIns="0" tIns="0" bIns="0"/>
+          <a:lstStyle/>
+          <a:p>
+            <a:pPr algn="ctr"/>
+            <a:r>
+              <a:rPr sz="1300" b="1">
+                <a:solidFill>
+                  <a:srgbClr val="FFFFFF"/>
+                </a:solidFill>
+                <a:latin typeface="Calibri"/>
+              </a:rPr>
+              <a:t>4</a:t>
+            </a:r>
+          </a:p>
+        </p:txBody>
+      </p:sp>
+      <p:sp>
+        <p:nvSpPr>
+          <p:cNvPr id="11" name="TextBox 10"/>
+          <p:cNvSpPr txBox="1"/>
+          <p:nvPr/>
+        </p:nvSpPr>
+        <p:spPr>
+          <a:xfrm>
+            <a:off x="1051560" y="3639312"/>
+            <a:ext cx="5257800" cy="502920"/>
+          </a:xfrm>
+          <a:prstGeom prst="rect">
+            <a:avLst/>
+          </a:prstGeom>
+          <a:noFill/>
+        </p:spPr>
+        <p:txBody>
+          <a:bodyPr wrap="square" lIns="0" rIns="0" tIns="0" bIns="0" anchor="t">
+            <a:spAutoFit/>
+          </a:bodyPr>
+          <a:lstStyle/>
+          <a:p>
+            <a:pPr algn="l">
+              <a:spcAft>
+                <a:spcPts val="600"/>
+              </a:spcAft>
+            </a:pPr>
+            <a:r>
+              <a:rPr sz="1500" b="0" i="0">
+                <a:solidFill>
+                  <a:srgbClr val="0A0E1A"/>
+                </a:solidFill>
+                <a:latin typeface="Calibri"/>
+              </a:rPr>
+              <a:t>Cierra la ventana. No hace falta pulsar Build todavía.</a:t>
+            </a:r>
+          </a:p>
+        </p:txBody>
+      </p:sp>
+      <p:sp>
+        <p:nvSpPr>
+          <p:cNvPr id="12" name="Oval 11"/>
+          <p:cNvSpPr/>
+          <p:nvPr/>
+        </p:nvSpPr>
+        <p:spPr>
+          <a:xfrm>
+            <a:off x="548640" y="4279392"/>
+            <a:ext cx="347472" cy="347472"/>
+          </a:xfrm>
+          <a:prstGeom prst="ellipse">
+            <a:avLst/>
+          </a:prstGeom>
+          <a:solidFill>
+            <a:srgbClr val="7317C9"/>
+          </a:solidFill>
+          <a:ln>
+            <a:noFill/>
+          </a:ln>
+          <a:effectLst/>
+        </p:spPr>
+        <p:style>
+          <a:lnRef idx="1">
+            <a:schemeClr val="accent1"/>
+          </a:lnRef>
+          <a:fillRef idx="3">
+            <a:schemeClr val="accent1"/>
+          </a:fillRef>
+          <a:effectRef idx="2">
+            <a:schemeClr val="accent1"/>
+          </a:effectRef>
+          <a:fontRef idx="minor">
+            <a:schemeClr val="lt1"/>
+          </a:fontRef>
+        </p:style>
+        <p:txBody>
+          <a:bodyPr rtlCol="0" anchor="ctr" lIns="0" rIns="0" tIns="0" bIns="0"/>
+          <a:lstStyle/>
+          <a:p>
+            <a:pPr algn="ctr"/>
+            <a:r>
+              <a:rPr sz="1300" b="1">
+                <a:solidFill>
+                  <a:srgbClr val="FFFFFF"/>
+                </a:solidFill>
+                <a:latin typeface="Calibri"/>
+              </a:rPr>
+              <a:t>5</a:t>
+            </a:r>
+          </a:p>
+        </p:txBody>
+      </p:sp>
+      <p:sp>
+        <p:nvSpPr>
+          <p:cNvPr id="13" name="TextBox 12"/>
+          <p:cNvSpPr txBox="1"/>
+          <p:nvPr/>
+        </p:nvSpPr>
+        <p:spPr>
+          <a:xfrm>
+            <a:off x="1051560" y="4297679"/>
+            <a:ext cx="5257800" cy="502920"/>
+          </a:xfrm>
+          <a:prstGeom prst="rect">
+            <a:avLst/>
+          </a:prstGeom>
+          <a:noFill/>
+        </p:spPr>
+        <p:txBody>
+          <a:bodyPr wrap="square" lIns="0" rIns="0" tIns="0" bIns="0" anchor="t">
+            <a:spAutoFit/>
+          </a:bodyPr>
+          <a:lstStyle/>
+          <a:p>
+            <a:pPr algn="l">
+              <a:spcAft>
+                <a:spcPts val="600"/>
+              </a:spcAft>
+            </a:pPr>
+            <a:r>
+              <a:rPr sz="1500" b="0" i="0">
+                <a:solidFill>
+                  <a:srgbClr val="0A0E1A"/>
+                </a:solidFill>
+                <a:latin typeface="Calibri"/>
+              </a:rPr>
+              <a:t>Abre 01_Menu y dale Play: juega los cuatro caminos de punta a punta.</a:t>
+            </a:r>
+          </a:p>
+        </p:txBody>
+      </p:sp>
+      <p:sp>
+        <p:nvSpPr>
+          <p:cNvPr id="14" name="Rounded Rectangle 13"/>
+          <p:cNvSpPr/>
+          <p:nvPr/>
+        </p:nvSpPr>
+        <p:spPr>
+          <a:xfrm>
+            <a:off x="548640" y="5074920"/>
+            <a:ext cx="5760720" cy="1143000"/>
           </a:xfrm>
           <a:prstGeom prst="roundRect">
             <a:avLst>
@@ -9369,14 +9802,14 @@
       </p:sp>
       <p:sp>
         <p:nvSpPr>
-          <p:cNvPr id="6" name="TextBox 5"/>
+          <p:cNvPr id="15" name="TextBox 14"/>
           <p:cNvSpPr txBox="1"/>
           <p:nvPr/>
         </p:nvSpPr>
         <p:spPr>
           <a:xfrm>
-            <a:off x="777240" y="2560320"/>
-            <a:ext cx="10652760" cy="868680"/>
+            <a:off x="777240" y="5257800"/>
+            <a:ext cx="5303520" cy="868680"/>
           </a:xfrm>
           <a:prstGeom prst="rect">
             <a:avLst/>
@@ -9395,13 +9828,13 @@
               </a:spcAft>
             </a:pPr>
             <a:r>
-              <a:rPr sz="1200" b="0" i="0">
+              <a:rPr sz="1300" b="0" i="0">
                 <a:solidFill>
                   <a:srgbClr val="E9EEFB"/>
                 </a:solidFill>
                 <a:latin typeface="Consolas"/>
               </a:rPr>
-              <a:t>fecha;mano;sensibilidad;mundo;escalones;gano;diametroFinal;segundos;segundosFuera;salidas;llegadaPromedioSeg</a:t>
+              <a:t>Scene '12_Runner' couldn't be loaded because it has</a:t>
             </a:r>
           </a:p>
           <a:p>
@@ -9411,27 +9844,27 @@
               </a:spcAft>
             </a:pPr>
             <a:r>
-              <a:rPr sz="1200" b="0" i="0">
+              <a:rPr sz="1300" b="0" i="0">
                 <a:solidFill>
                   <a:srgbClr val="E9EEFB"/>
                 </a:solidFill>
                 <a:latin typeface="Consolas"/>
               </a:rPr>
-              <a:t>2026-10-21 08:28:35;Derecha;0,25;Bosque;13;si;0,50;15,0;0,0;0;0,90</a:t>
-            </a:r>
-          </a:p>
-        </p:txBody>
-      </p:sp>
-      <p:sp>
-        <p:nvSpPr>
-          <p:cNvPr id="7" name="Rounded Rectangle 6"/>
+              <a:t>not been added to the build settings</a:t>
+            </a:r>
+          </a:p>
+        </p:txBody>
+      </p:sp>
+      <p:sp>
+        <p:nvSpPr>
+          <p:cNvPr id="16" name="Rounded Rectangle 15"/>
           <p:cNvSpPr/>
           <p:nvPr/>
         </p:nvSpPr>
         <p:spPr>
           <a:xfrm>
-            <a:off x="548640" y="3749039"/>
-            <a:ext cx="5394960" cy="2514600"/>
+            <a:off x="6675120" y="1645920"/>
+            <a:ext cx="4983480" cy="4572000"/>
           </a:xfrm>
           <a:prstGeom prst="roundRect">
             <a:avLst>
@@ -9470,14 +9903,14 @@
       </p:sp>
       <p:sp>
         <p:nvSpPr>
-          <p:cNvPr id="8" name="TextBox 7"/>
+          <p:cNvPr id="17" name="TextBox 16"/>
           <p:cNvSpPr txBox="1"/>
           <p:nvPr/>
         </p:nvSpPr>
         <p:spPr>
           <a:xfrm>
-            <a:off x="777240" y="3886200"/>
-            <a:ext cx="5029200" cy="2286000"/>
+            <a:off x="6903720" y="1783080"/>
+            <a:ext cx="4572000" cy="365760"/>
           </a:xfrm>
           <a:prstGeom prst="rect">
             <a:avLst/>
@@ -9496,119 +9929,27 @@
               </a:spcAft>
             </a:pPr>
             <a:r>
-              <a:rPr sz="1400" b="1" i="0">
-                <a:solidFill>
-                  <a:srgbClr val="0A0E1A"/>
-                </a:solidFill>
-                <a:latin typeface="Calibri"/>
-              </a:rPr>
-              <a:t>Dónde quedan</a:t>
-            </a:r>
-          </a:p>
-          <a:p>
-            <a:pPr algn="l">
-              <a:spcAft>
-                <a:spcPts val="600"/>
-              </a:spcAft>
-            </a:pPr>
-            <a:r>
-              <a:rPr sz="1300" b="0" i="0">
-                <a:solidFill>
-                  <a:srgbClr val="0A0E1A"/>
-                </a:solidFill>
-                <a:latin typeface="Consolas"/>
-              </a:rPr>
-              <a:t>C:\Users\&lt;usuario&gt;\AppData\LocalLow\</a:t>
-            </a:r>
-          </a:p>
-          <a:p>
-            <a:pPr algn="l">
-              <a:spcAft>
-                <a:spcPts val="600"/>
-              </a:spcAft>
-            </a:pPr>
-            <a:r>
-              <a:rPr sz="1300" b="0" i="0">
-                <a:solidFill>
-                  <a:srgbClr val="0A0E1A"/>
-                </a:solidFill>
-                <a:latin typeface="Consolas"/>
-              </a:rPr>
-              <a:t>&lt;empresa&gt;\&lt;proyecto&gt;\resultados_&lt;juego&gt;.csv</a:t>
-            </a:r>
-          </a:p>
-          <a:p>
-            <a:pPr algn="l">
-              <a:spcAft>
-                <a:spcPts val="600"/>
-              </a:spcAft>
-            </a:pPr>
-            <a:r>
-              <a:rPr sz="1400" b="0" i="0">
-                <a:solidFill>
-                  <a:srgbClr val="0A0E1A"/>
-                </a:solidFill>
-                <a:latin typeface="Calibri"/>
-              </a:rPr>
-              <a:t>La ruta exacta sale en la Console cada vez que se guarda.</a:t>
-            </a:r>
-          </a:p>
-        </p:txBody>
-      </p:sp>
-      <p:sp>
-        <p:nvSpPr>
-          <p:cNvPr id="9" name="Rounded Rectangle 8"/>
-          <p:cNvSpPr/>
-          <p:nvPr/>
-        </p:nvSpPr>
-        <p:spPr>
-          <a:xfrm>
-            <a:off x="6263640" y="3749039"/>
-            <a:ext cx="5394960" cy="2514600"/>
-          </a:xfrm>
-          <a:prstGeom prst="roundRect">
-            <a:avLst>
-              <a:gd name="adj" fmla="val 6000"/>
-            </a:avLst>
-          </a:prstGeom>
-          <a:solidFill>
-            <a:srgbClr val="F1E8FC"/>
-          </a:solidFill>
-          <a:ln>
-            <a:noFill/>
-          </a:ln>
-          <a:effectLst/>
-        </p:spPr>
-        <p:style>
-          <a:lnRef idx="1">
-            <a:schemeClr val="accent1"/>
-          </a:lnRef>
-          <a:fillRef idx="3">
-            <a:schemeClr val="accent1"/>
-          </a:fillRef>
-          <a:effectRef idx="2">
-            <a:schemeClr val="accent1"/>
-          </a:effectRef>
-          <a:fontRef idx="minor">
-            <a:schemeClr val="lt1"/>
-          </a:fontRef>
-        </p:style>
-        <p:txBody>
-          <a:bodyPr rtlCol="0" anchor="ctr"/>
-          <a:lstStyle/>
-          <a:p/>
-        </p:txBody>
-      </p:sp>
-      <p:sp>
-        <p:nvSpPr>
-          <p:cNvPr id="10" name="TextBox 9"/>
+              <a:rPr sz="1700" b="1" i="0">
+                <a:solidFill>
+                  <a:srgbClr val="0A0E1A"/>
+                </a:solidFill>
+                <a:latin typeface="Calibri"/>
+              </a:rPr>
+              <a:t>La prueba completa</a:t>
+            </a:r>
+          </a:p>
+        </p:txBody>
+      </p:sp>
+      <p:sp>
+        <p:nvSpPr>
+          <p:cNvPr id="18" name="TextBox 17"/>
           <p:cNvSpPr txBox="1"/>
           <p:nvPr/>
         </p:nvSpPr>
         <p:spPr>
           <a:xfrm>
-            <a:off x="6492240" y="3886200"/>
-            <a:ext cx="5029200" cy="2286000"/>
+            <a:off x="6903720" y="2286000"/>
+            <a:ext cx="4572000" cy="548640"/>
           </a:xfrm>
           <a:prstGeom prst="rect">
             <a:avLst/>
@@ -9623,25 +9964,18 @@
           <a:p>
             <a:pPr algn="l">
               <a:spcAft>
-                <a:spcPts val="800"/>
-              </a:spcAft>
-            </a:pPr>
-            <a:r>
-              <a:rPr sz="1400" b="1" i="0">
-                <a:solidFill>
-                  <a:srgbClr val="0A0E1A"/>
-                </a:solidFill>
-                <a:latin typeface="Calibri"/>
-              </a:rPr>
-              <a:t>Para el artículo</a:t>
-            </a:r>
-          </a:p>
-          <a:p>
-            <a:pPr algn="l">
-              <a:spcAft>
-                <a:spcPts val="800"/>
-              </a:spcAft>
-            </a:pPr>
+                <a:spcPts val="600"/>
+              </a:spcAft>
+            </a:pPr>
+            <a:r>
+              <a:rPr sz="1600" b="0" i="0">
+                <a:solidFill>
+                  <a:srgbClr val="7317C9"/>
+                </a:solidFill>
+                <a:latin typeface="Calibri"/>
+              </a:rPr>
+              <a:t>☐  </a:t>
+            </a:r>
             <a:r>
               <a:rPr sz="1400" b="0" i="0">
                 <a:solidFill>
@@ -9649,37 +9983,21 @@
                 </a:solidFill>
                 <a:latin typeface="Calibri"/>
               </a:rPr>
-              <a:t>Se abre con doble clic en Excel: el punto y coma separa columnas y la coma es el decimal.</a:t>
-            </a:r>
-          </a:p>
-          <a:p>
-            <a:pPr algn="l">
-              <a:spcAft>
-                <a:spcPts val="800"/>
-              </a:spcAft>
-            </a:pPr>
-            <a:r>
-              <a:rPr sz="1400" b="0" i="0">
-                <a:solidFill>
-                  <a:srgbClr val="0A0E1A"/>
-                </a:solidFill>
-                <a:latin typeface="Calibri"/>
-              </a:rPr>
-              <a:t>Con la columna mano comparas derecha contra izquierda; con sensibilidad, fino contra grueso.</a:t>
-            </a:r>
-          </a:p>
-        </p:txBody>
-      </p:sp>
-      <p:sp>
-        <p:nvSpPr>
-          <p:cNvPr id="11" name="Pie"/>
+              <a:t>Menú: mano derecha, luego Colorear.</a:t>
+            </a:r>
+          </a:p>
+        </p:txBody>
+      </p:sp>
+      <p:sp>
+        <p:nvSpPr>
+          <p:cNvPr id="19" name="TextBox 18"/>
           <p:cNvSpPr txBox="1"/>
           <p:nvPr/>
         </p:nvSpPr>
         <p:spPr>
           <a:xfrm>
-            <a:off x="548640" y="6400800"/>
-            <a:ext cx="11064240" cy="274320"/>
+            <a:off x="6903720" y="2907792"/>
+            <a:ext cx="4572000" cy="548640"/>
           </a:xfrm>
           <a:prstGeom prst="rect">
             <a:avLst/>
@@ -9692,6 +10010,246 @@
           </a:bodyPr>
           <a:lstStyle/>
           <a:p>
+            <a:pPr algn="l">
+              <a:spcAft>
+                <a:spcPts val="600"/>
+              </a:spcAft>
+            </a:pPr>
+            <a:r>
+              <a:rPr sz="1600" b="0" i="0">
+                <a:solidFill>
+                  <a:srgbClr val="7317C9"/>
+                </a:solidFill>
+                <a:latin typeface="Calibri"/>
+              </a:rPr>
+              <a:t>☐  </a:t>
+            </a:r>
+            <a:r>
+              <a:rPr sz="1400" b="0" i="0">
+                <a:solidFill>
+                  <a:srgbClr val="0A0E1A"/>
+                </a:solidFill>
+                <a:latin typeface="Calibri"/>
+              </a:rPr>
+              <a:t>Colorear: pinta, elige otro color, pulsa Listo.</a:t>
+            </a:r>
+          </a:p>
+        </p:txBody>
+      </p:sp>
+      <p:sp>
+        <p:nvSpPr>
+          <p:cNvPr id="20" name="TextBox 19"/>
+          <p:cNvSpPr txBox="1"/>
+          <p:nvPr/>
+        </p:nvSpPr>
+        <p:spPr>
+          <a:xfrm>
+            <a:off x="6903720" y="3529584"/>
+            <a:ext cx="4572000" cy="548640"/>
+          </a:xfrm>
+          <a:prstGeom prst="rect">
+            <a:avLst/>
+          </a:prstGeom>
+          <a:noFill/>
+        </p:spPr>
+        <p:txBody>
+          <a:bodyPr wrap="square" lIns="0" rIns="0" tIns="0" bIns="0" anchor="t">
+            <a:spAutoFit/>
+          </a:bodyPr>
+          <a:lstStyle/>
+          <a:p>
+            <a:pPr algn="l">
+              <a:spcAft>
+                <a:spcPts val="600"/>
+              </a:spcAft>
+            </a:pPr>
+            <a:r>
+              <a:rPr sz="1600" b="0" i="0">
+                <a:solidFill>
+                  <a:srgbClr val="7317C9"/>
+                </a:solidFill>
+                <a:latin typeface="Calibri"/>
+              </a:rPr>
+              <a:t>☐  </a:t>
+            </a:r>
+            <a:r>
+              <a:rPr sz="1400" b="0" i="0">
+                <a:solidFill>
+                  <a:srgbClr val="0A0E1A"/>
+                </a:solidFill>
+                <a:latin typeface="Calibri"/>
+              </a:rPr>
+              <a:t>Runner: tu personaje esquiva hasta el final.</a:t>
+            </a:r>
+          </a:p>
+        </p:txBody>
+      </p:sp>
+      <p:sp>
+        <p:nvSpPr>
+          <p:cNvPr id="21" name="TextBox 20"/>
+          <p:cNvSpPr txBox="1"/>
+          <p:nvPr/>
+        </p:nvSpPr>
+        <p:spPr>
+          <a:xfrm>
+            <a:off x="6903720" y="4151376"/>
+            <a:ext cx="4572000" cy="548640"/>
+          </a:xfrm>
+          <a:prstGeom prst="rect">
+            <a:avLst/>
+          </a:prstGeom>
+          <a:noFill/>
+        </p:spPr>
+        <p:txBody>
+          <a:bodyPr wrap="square" lIns="0" rIns="0" tIns="0" bIns="0" anchor="t">
+            <a:spAutoFit/>
+          </a:bodyPr>
+          <a:lstStyle/>
+          <a:p>
+            <a:pPr algn="l">
+              <a:spcAft>
+                <a:spcPts val="600"/>
+              </a:spcAft>
+            </a:pPr>
+            <a:r>
+              <a:rPr sz="1600" b="0" i="0">
+                <a:solidFill>
+                  <a:srgbClr val="7317C9"/>
+                </a:solidFill>
+                <a:latin typeface="Calibri"/>
+              </a:rPr>
+              <a:t>☐  </a:t>
+            </a:r>
+            <a:r>
+              <a:rPr sz="1400" b="0" i="0">
+                <a:solidFill>
+                  <a:srgbClr val="0A0E1A"/>
+                </a:solidFill>
+                <a:latin typeface="Calibri"/>
+              </a:rPr>
+              <a:t>Otra vez desde el menú: Camino.</a:t>
+            </a:r>
+          </a:p>
+        </p:txBody>
+      </p:sp>
+      <p:sp>
+        <p:nvSpPr>
+          <p:cNvPr id="22" name="TextBox 21"/>
+          <p:cNvSpPr txBox="1"/>
+          <p:nvPr/>
+        </p:nvSpPr>
+        <p:spPr>
+          <a:xfrm>
+            <a:off x="6903720" y="4773168"/>
+            <a:ext cx="4572000" cy="548640"/>
+          </a:xfrm>
+          <a:prstGeom prst="rect">
+            <a:avLst/>
+          </a:prstGeom>
+          <a:noFill/>
+        </p:spPr>
+        <p:txBody>
+          <a:bodyPr wrap="square" lIns="0" rIns="0" tIns="0" bIns="0" anchor="t">
+            <a:spAutoFit/>
+          </a:bodyPr>
+          <a:lstStyle/>
+          <a:p>
+            <a:pPr algn="l">
+              <a:spcAft>
+                <a:spcPts val="600"/>
+              </a:spcAft>
+            </a:pPr>
+            <a:r>
+              <a:rPr sz="1600" b="0" i="0">
+                <a:solidFill>
+                  <a:srgbClr val="7317C9"/>
+                </a:solidFill>
+                <a:latin typeface="Calibri"/>
+              </a:rPr>
+              <a:t>☐  </a:t>
+            </a:r>
+            <a:r>
+              <a:rPr sz="1400" b="0" i="0">
+                <a:solidFill>
+                  <a:srgbClr val="0A0E1A"/>
+                </a:solidFill>
+                <a:latin typeface="Calibri"/>
+              </a:rPr>
+              <a:t>Y por último un mundo del Grueso.</a:t>
+            </a:r>
+          </a:p>
+        </p:txBody>
+      </p:sp>
+      <p:sp>
+        <p:nvSpPr>
+          <p:cNvPr id="23" name="TextBox 22"/>
+          <p:cNvSpPr txBox="1"/>
+          <p:nvPr/>
+        </p:nvSpPr>
+        <p:spPr>
+          <a:xfrm>
+            <a:off x="6903720" y="5394960"/>
+            <a:ext cx="4572000" cy="548640"/>
+          </a:xfrm>
+          <a:prstGeom prst="rect">
+            <a:avLst/>
+          </a:prstGeom>
+          <a:noFill/>
+        </p:spPr>
+        <p:txBody>
+          <a:bodyPr wrap="square" lIns="0" rIns="0" tIns="0" bIns="0" anchor="t">
+            <a:spAutoFit/>
+          </a:bodyPr>
+          <a:lstStyle/>
+          <a:p>
+            <a:pPr algn="l">
+              <a:spcAft>
+                <a:spcPts val="600"/>
+              </a:spcAft>
+            </a:pPr>
+            <a:r>
+              <a:rPr sz="1600" b="0" i="0">
+                <a:solidFill>
+                  <a:srgbClr val="7317C9"/>
+                </a:solidFill>
+                <a:latin typeface="Calibri"/>
+              </a:rPr>
+              <a:t>☐  </a:t>
+            </a:r>
+            <a:r>
+              <a:rPr sz="1400" b="0" i="0">
+                <a:solidFill>
+                  <a:srgbClr val="0A0E1A"/>
+                </a:solidFill>
+                <a:latin typeface="Calibri"/>
+              </a:rPr>
+              <a:t>Repite con la mano izquierda.</a:t>
+            </a:r>
+          </a:p>
+        </p:txBody>
+      </p:sp>
+      <p:sp>
+        <p:nvSpPr>
+          <p:cNvPr id="24" name="Pie"/>
+          <p:cNvSpPr txBox="1"/>
+          <p:nvPr/>
+        </p:nvSpPr>
+        <p:spPr>
+          <a:xfrm>
+            <a:off x="548640" y="6400800"/>
+            <a:ext cx="11064240" cy="274320"/>
+          </a:xfrm>
+          <a:prstGeom prst="rect">
+            <a:avLst/>
+          </a:prstGeom>
+          <a:noFill/>
+        </p:spPr>
+        <p:txBody>
+          <a:bodyPr wrap="square" lIns="0" rIns="0" tIns="0" bIns="0" anchor="t">
+            <a:spAutoFit/>
+          </a:bodyPr>
+          <a:lstStyle/>
+          <a:p>
             <a:pPr algn="r">
               <a:spcAft>
                 <a:spcPts val="600"/>
@@ -9704,7 +10262,7 @@
                 </a:solidFill>
                 <a:latin typeface="Calibri"/>
               </a:rPr>
-              <a:t>Guía 1 · Motricidad  ·  14 de 16</a:t>
+              <a:t>Guía 1 · Motricidad  ·  14 de 17</a:t>
             </a:r>
           </a:p>
         </p:txBody>
@@ -9808,21 +10366,159 @@
                 </a:solidFill>
                 <a:latin typeface="Cambria"/>
               </a:rPr>
-              <a:t>Si algo falla, busca aquí primero</a:t>
-            </a:r>
-          </a:p>
-        </p:txBody>
-      </p:sp>
-      <p:sp>
-        <p:nvSpPr>
-          <p:cNvPr id="4" name="Rounded Rectangle 3"/>
+              <a:t>Los datos que deja cada partida</a:t>
+            </a:r>
+          </a:p>
+        </p:txBody>
+      </p:sp>
+      <p:sp>
+        <p:nvSpPr>
+          <p:cNvPr id="4" name="TextBox 3"/>
+          <p:cNvSpPr txBox="1"/>
+          <p:nvPr/>
+        </p:nvSpPr>
+        <p:spPr>
+          <a:xfrm>
+            <a:off x="548640" y="1645920"/>
+            <a:ext cx="11064240" cy="731520"/>
+          </a:xfrm>
+          <a:prstGeom prst="rect">
+            <a:avLst/>
+          </a:prstGeom>
+          <a:noFill/>
+        </p:spPr>
+        <p:txBody>
+          <a:bodyPr wrap="square" lIns="0" rIns="0" tIns="0" bIns="0" anchor="t">
+            <a:spAutoFit/>
+          </a:bodyPr>
+          <a:lstStyle/>
+          <a:p>
+            <a:pPr algn="l">
+              <a:spcAft>
+                <a:spcPts val="600"/>
+              </a:spcAft>
+            </a:pPr>
+            <a:r>
+              <a:rPr sz="1500" b="0" i="0">
+                <a:solidFill>
+                  <a:srgbClr val="0A0E1A"/>
+                </a:solidFill>
+                <a:latin typeface="Calibri"/>
+              </a:rPr>
+              <a:t>Cada juego escribe un archivo CSV con una fila por partida. Esta fila es real: la dejó el juego de referencia el 21 de octubre.</a:t>
+            </a:r>
+          </a:p>
+        </p:txBody>
+      </p:sp>
+      <p:sp>
+        <p:nvSpPr>
+          <p:cNvPr id="5" name="Rounded Rectangle 4"/>
           <p:cNvSpPr/>
           <p:nvPr/>
         </p:nvSpPr>
         <p:spPr>
           <a:xfrm>
-            <a:off x="548640" y="1645920"/>
-            <a:ext cx="5440680" cy="1371600"/>
+            <a:off x="548640" y="2377440"/>
+            <a:ext cx="11109960" cy="1143000"/>
+          </a:xfrm>
+          <a:prstGeom prst="roundRect">
+            <a:avLst>
+              <a:gd name="adj" fmla="val 5000"/>
+            </a:avLst>
+          </a:prstGeom>
+          <a:solidFill>
+            <a:srgbClr val="0F1424"/>
+          </a:solidFill>
+          <a:ln>
+            <a:noFill/>
+          </a:ln>
+          <a:effectLst/>
+        </p:spPr>
+        <p:style>
+          <a:lnRef idx="1">
+            <a:schemeClr val="accent1"/>
+          </a:lnRef>
+          <a:fillRef idx="3">
+            <a:schemeClr val="accent1"/>
+          </a:fillRef>
+          <a:effectRef idx="2">
+            <a:schemeClr val="accent1"/>
+          </a:effectRef>
+          <a:fontRef idx="minor">
+            <a:schemeClr val="lt1"/>
+          </a:fontRef>
+        </p:style>
+        <p:txBody>
+          <a:bodyPr rtlCol="0" anchor="ctr"/>
+          <a:lstStyle/>
+          <a:p/>
+        </p:txBody>
+      </p:sp>
+      <p:sp>
+        <p:nvSpPr>
+          <p:cNvPr id="6" name="TextBox 5"/>
+          <p:cNvSpPr txBox="1"/>
+          <p:nvPr/>
+        </p:nvSpPr>
+        <p:spPr>
+          <a:xfrm>
+            <a:off x="777240" y="2560320"/>
+            <a:ext cx="10652760" cy="868680"/>
+          </a:xfrm>
+          <a:prstGeom prst="rect">
+            <a:avLst/>
+          </a:prstGeom>
+          <a:noFill/>
+        </p:spPr>
+        <p:txBody>
+          <a:bodyPr wrap="square" lIns="0" rIns="0" tIns="0" bIns="0" anchor="t">
+            <a:spAutoFit/>
+          </a:bodyPr>
+          <a:lstStyle/>
+          <a:p>
+            <a:pPr algn="l">
+              <a:spcAft>
+                <a:spcPts val="200"/>
+              </a:spcAft>
+            </a:pPr>
+            <a:r>
+              <a:rPr sz="1200" b="0" i="0">
+                <a:solidFill>
+                  <a:srgbClr val="E9EEFB"/>
+                </a:solidFill>
+                <a:latin typeface="Consolas"/>
+              </a:rPr>
+              <a:t>fecha;mano;sensibilidad;mundo;escalones;gano;diametroFinal;segundos;segundosFuera;salidas;llegadaPromedioSeg</a:t>
+            </a:r>
+          </a:p>
+          <a:p>
+            <a:pPr algn="l">
+              <a:spcAft>
+                <a:spcPts val="200"/>
+              </a:spcAft>
+            </a:pPr>
+            <a:r>
+              <a:rPr sz="1200" b="0" i="0">
+                <a:solidFill>
+                  <a:srgbClr val="E9EEFB"/>
+                </a:solidFill>
+                <a:latin typeface="Consolas"/>
+              </a:rPr>
+              <a:t>2026-10-21 08:28:35;Derecha;0,25;Bosque;13;si;0,50;15,0;0,0;0;0,90</a:t>
+            </a:r>
+          </a:p>
+        </p:txBody>
+      </p:sp>
+      <p:sp>
+        <p:nvSpPr>
+          <p:cNvPr id="7" name="Rounded Rectangle 6"/>
+          <p:cNvSpPr/>
+          <p:nvPr/>
+        </p:nvSpPr>
+        <p:spPr>
+          <a:xfrm>
+            <a:off x="548640" y="3749039"/>
+            <a:ext cx="5394960" cy="2514600"/>
           </a:xfrm>
           <a:prstGeom prst="roundRect">
             <a:avLst>
@@ -9861,14 +10557,14 @@
       </p:sp>
       <p:sp>
         <p:nvSpPr>
-          <p:cNvPr id="5" name="TextBox 4"/>
+          <p:cNvPr id="8" name="TextBox 7"/>
           <p:cNvSpPr txBox="1"/>
           <p:nvPr/>
         </p:nvSpPr>
         <p:spPr>
           <a:xfrm>
-            <a:off x="777240" y="1801368"/>
-            <a:ext cx="5029200" cy="1143000"/>
+            <a:off x="777240" y="3886200"/>
+            <a:ext cx="5029200" cy="2286000"/>
           </a:xfrm>
           <a:prstGeom prst="rect">
             <a:avLst/>
@@ -9883,23 +10579,55 @@
           <a:p>
             <a:pPr algn="l">
               <a:spcAft>
-                <a:spcPts val="400"/>
-              </a:spcAft>
-            </a:pPr>
-            <a:r>
-              <a:rPr sz="1300" b="1" i="0">
-                <a:solidFill>
-                  <a:srgbClr val="B3261E"/>
+                <a:spcPts val="600"/>
+              </a:spcAft>
+            </a:pPr>
+            <a:r>
+              <a:rPr sz="1400" b="1" i="0">
+                <a:solidFill>
+                  <a:srgbClr val="0A0E1A"/>
+                </a:solidFill>
+                <a:latin typeface="Calibri"/>
+              </a:rPr>
+              <a:t>Dónde quedan</a:t>
+            </a:r>
+          </a:p>
+          <a:p>
+            <a:pPr algn="l">
+              <a:spcAft>
+                <a:spcPts val="600"/>
+              </a:spcAft>
+            </a:pPr>
+            <a:r>
+              <a:rPr sz="1300" b="0" i="0">
+                <a:solidFill>
+                  <a:srgbClr val="0A0E1A"/>
                 </a:solidFill>
                 <a:latin typeface="Consolas"/>
               </a:rPr>
-              <a:t>UnassignedReferenceException</a:t>
-            </a:r>
-          </a:p>
-          <a:p>
-            <a:pPr algn="l">
-              <a:spcAft>
-                <a:spcPts val="400"/>
+              <a:t>C:\Users\&lt;usuario&gt;\AppData\LocalLow\</a:t>
+            </a:r>
+          </a:p>
+          <a:p>
+            <a:pPr algn="l">
+              <a:spcAft>
+                <a:spcPts val="600"/>
+              </a:spcAft>
+            </a:pPr>
+            <a:r>
+              <a:rPr sz="1300" b="0" i="0">
+                <a:solidFill>
+                  <a:srgbClr val="0A0E1A"/>
+                </a:solidFill>
+                <a:latin typeface="Consolas"/>
+              </a:rPr>
+              <a:t>&lt;empresa&gt;\&lt;proyecto&gt;\resultados_&lt;juego&gt;.csv</a:t>
+            </a:r>
+          </a:p>
+          <a:p>
+            <a:pPr algn="l">
+              <a:spcAft>
+                <a:spcPts val="600"/>
               </a:spcAft>
             </a:pPr>
             <a:r>
@@ -9909,20 +10637,278 @@
                 </a:solidFill>
                 <a:latin typeface="Calibri"/>
               </a:rPr>
-              <a:t>Una casilla del Inspector quedó vacía. El mensaje dice cuál: arrastra el objeto.</a:t>
-            </a:r>
-          </a:p>
-        </p:txBody>
-      </p:sp>
-      <p:sp>
-        <p:nvSpPr>
-          <p:cNvPr id="6" name="Rounded Rectangle 5"/>
+              <a:t>La ruta exacta sale en la Console cada vez que se guarda.</a:t>
+            </a:r>
+          </a:p>
+        </p:txBody>
+      </p:sp>
+      <p:sp>
+        <p:nvSpPr>
+          <p:cNvPr id="9" name="Rounded Rectangle 8"/>
           <p:cNvSpPr/>
           <p:nvPr/>
         </p:nvSpPr>
         <p:spPr>
           <a:xfrm>
-            <a:off x="6172200" y="1645920"/>
+            <a:off x="6263640" y="3749039"/>
+            <a:ext cx="5394960" cy="2514600"/>
+          </a:xfrm>
+          <a:prstGeom prst="roundRect">
+            <a:avLst>
+              <a:gd name="adj" fmla="val 6000"/>
+            </a:avLst>
+          </a:prstGeom>
+          <a:solidFill>
+            <a:srgbClr val="F1E8FC"/>
+          </a:solidFill>
+          <a:ln>
+            <a:noFill/>
+          </a:ln>
+          <a:effectLst/>
+        </p:spPr>
+        <p:style>
+          <a:lnRef idx="1">
+            <a:schemeClr val="accent1"/>
+          </a:lnRef>
+          <a:fillRef idx="3">
+            <a:schemeClr val="accent1"/>
+          </a:fillRef>
+          <a:effectRef idx="2">
+            <a:schemeClr val="accent1"/>
+          </a:effectRef>
+          <a:fontRef idx="minor">
+            <a:schemeClr val="lt1"/>
+          </a:fontRef>
+        </p:style>
+        <p:txBody>
+          <a:bodyPr rtlCol="0" anchor="ctr"/>
+          <a:lstStyle/>
+          <a:p/>
+        </p:txBody>
+      </p:sp>
+      <p:sp>
+        <p:nvSpPr>
+          <p:cNvPr id="10" name="TextBox 9"/>
+          <p:cNvSpPr txBox="1"/>
+          <p:nvPr/>
+        </p:nvSpPr>
+        <p:spPr>
+          <a:xfrm>
+            <a:off x="6492240" y="3886200"/>
+            <a:ext cx="5029200" cy="2286000"/>
+          </a:xfrm>
+          <a:prstGeom prst="rect">
+            <a:avLst/>
+          </a:prstGeom>
+          <a:noFill/>
+        </p:spPr>
+        <p:txBody>
+          <a:bodyPr wrap="square" lIns="0" rIns="0" tIns="0" bIns="0" anchor="t">
+            <a:spAutoFit/>
+          </a:bodyPr>
+          <a:lstStyle/>
+          <a:p>
+            <a:pPr algn="l">
+              <a:spcAft>
+                <a:spcPts val="800"/>
+              </a:spcAft>
+            </a:pPr>
+            <a:r>
+              <a:rPr sz="1400" b="1" i="0">
+                <a:solidFill>
+                  <a:srgbClr val="0A0E1A"/>
+                </a:solidFill>
+                <a:latin typeface="Calibri"/>
+              </a:rPr>
+              <a:t>Para el artículo</a:t>
+            </a:r>
+          </a:p>
+          <a:p>
+            <a:pPr algn="l">
+              <a:spcAft>
+                <a:spcPts val="800"/>
+              </a:spcAft>
+            </a:pPr>
+            <a:r>
+              <a:rPr sz="1400" b="0" i="0">
+                <a:solidFill>
+                  <a:srgbClr val="0A0E1A"/>
+                </a:solidFill>
+                <a:latin typeface="Calibri"/>
+              </a:rPr>
+              <a:t>Se abre con doble clic en Excel: el punto y coma separa columnas y la coma es el decimal.</a:t>
+            </a:r>
+          </a:p>
+          <a:p>
+            <a:pPr algn="l">
+              <a:spcAft>
+                <a:spcPts val="800"/>
+              </a:spcAft>
+            </a:pPr>
+            <a:r>
+              <a:rPr sz="1400" b="0" i="0">
+                <a:solidFill>
+                  <a:srgbClr val="0A0E1A"/>
+                </a:solidFill>
+                <a:latin typeface="Calibri"/>
+              </a:rPr>
+              <a:t>Con la columna mano comparas derecha contra izquierda; con sensibilidad, fino contra grueso.</a:t>
+            </a:r>
+          </a:p>
+        </p:txBody>
+      </p:sp>
+      <p:sp>
+        <p:nvSpPr>
+          <p:cNvPr id="11" name="Pie"/>
+          <p:cNvSpPr txBox="1"/>
+          <p:nvPr/>
+        </p:nvSpPr>
+        <p:spPr>
+          <a:xfrm>
+            <a:off x="548640" y="6400800"/>
+            <a:ext cx="11064240" cy="274320"/>
+          </a:xfrm>
+          <a:prstGeom prst="rect">
+            <a:avLst/>
+          </a:prstGeom>
+          <a:noFill/>
+        </p:spPr>
+        <p:txBody>
+          <a:bodyPr wrap="square" lIns="0" rIns="0" tIns="0" bIns="0" anchor="t">
+            <a:spAutoFit/>
+          </a:bodyPr>
+          <a:lstStyle/>
+          <a:p>
+            <a:pPr algn="r">
+              <a:spcAft>
+                <a:spcPts val="600"/>
+              </a:spcAft>
+            </a:pPr>
+            <a:r>
+              <a:rPr sz="1100" b="0" i="0">
+                <a:solidFill>
+                  <a:srgbClr val="4F5C75"/>
+                </a:solidFill>
+                <a:latin typeface="Calibri"/>
+              </a:rPr>
+              <a:t>Guía 1 · Motricidad  ·  15 de 17</a:t>
+            </a:r>
+          </a:p>
+        </p:txBody>
+      </p:sp>
+    </p:spTree>
+  </p:cSld>
+  <p:clrMapOvr>
+    <a:masterClrMapping/>
+  </p:clrMapOvr>
+</p:sld>
+</file>
+
+<file path=ppt/slides/slide16.xml><?xml version="1.0" encoding="utf-8"?>
+<p:sld xmlns:a="http://schemas.openxmlformats.org/drawingml/2006/main" xmlns:p="http://schemas.openxmlformats.org/presentationml/2006/main" xmlns:r="http://schemas.openxmlformats.org/officeDocument/2006/relationships">
+  <p:cSld>
+    <p:bg>
+      <p:bgPr>
+        <a:solidFill>
+          <a:srgbClr val="EFF3FA"/>
+        </a:solidFill>
+        <a:effectLst/>
+      </p:bgPr>
+    </p:bg>
+    <p:spTree>
+      <p:nvGrpSpPr>
+        <p:cNvPr id="1" name=""/>
+        <p:cNvGrpSpPr/>
+        <p:nvPr/>
+      </p:nvGrpSpPr>
+      <p:grpSpPr/>
+      <p:sp>
+        <p:nvSpPr>
+          <p:cNvPr id="2" name="Etiqueta de sección"/>
+          <p:cNvSpPr txBox="1"/>
+          <p:nvPr/>
+        </p:nvSpPr>
+        <p:spPr>
+          <a:xfrm>
+            <a:off x="548640" y="320040"/>
+            <a:ext cx="2743200" cy="274320"/>
+          </a:xfrm>
+          <a:prstGeom prst="rect">
+            <a:avLst/>
+          </a:prstGeom>
+          <a:noFill/>
+        </p:spPr>
+        <p:txBody>
+          <a:bodyPr wrap="square" lIns="0" rIns="0" tIns="0" bIns="0" anchor="t">
+            <a:spAutoFit/>
+          </a:bodyPr>
+          <a:lstStyle/>
+          <a:p>
+            <a:pPr algn="l">
+              <a:spcAft>
+                <a:spcPts val="600"/>
+              </a:spcAft>
+            </a:pPr>
+            <a:r>
+              <a:rPr sz="1200" b="1" i="0">
+                <a:solidFill>
+                  <a:srgbClr val="7317C9"/>
+                </a:solidFill>
+                <a:latin typeface="Calibri"/>
+              </a:rPr>
+              <a:t>Unity</a:t>
+            </a:r>
+          </a:p>
+        </p:txBody>
+      </p:sp>
+      <p:sp>
+        <p:nvSpPr>
+          <p:cNvPr id="3" name="Título"/>
+          <p:cNvSpPr txBox="1"/>
+          <p:nvPr/>
+        </p:nvSpPr>
+        <p:spPr>
+          <a:xfrm>
+            <a:off x="548640" y="658368"/>
+            <a:ext cx="11064240" cy="731520"/>
+          </a:xfrm>
+          <a:prstGeom prst="rect">
+            <a:avLst/>
+          </a:prstGeom>
+          <a:noFill/>
+        </p:spPr>
+        <p:txBody>
+          <a:bodyPr wrap="square" lIns="0" rIns="0" tIns="0" bIns="0" anchor="t">
+            <a:spAutoFit/>
+          </a:bodyPr>
+          <a:lstStyle/>
+          <a:p>
+            <a:pPr algn="l">
+              <a:spcAft>
+                <a:spcPts val="600"/>
+              </a:spcAft>
+            </a:pPr>
+            <a:r>
+              <a:rPr sz="3200" b="1" i="0">
+                <a:solidFill>
+                  <a:srgbClr val="0A0E1A"/>
+                </a:solidFill>
+                <a:latin typeface="Cambria"/>
+              </a:rPr>
+              <a:t>Si algo falla, busca aquí primero</a:t>
+            </a:r>
+          </a:p>
+        </p:txBody>
+      </p:sp>
+      <p:sp>
+        <p:nvSpPr>
+          <p:cNvPr id="4" name="Rounded Rectangle 3"/>
+          <p:cNvSpPr/>
+          <p:nvPr/>
+        </p:nvSpPr>
+        <p:spPr>
+          <a:xfrm>
+            <a:off x="548640" y="1645920"/>
             <a:ext cx="5440680" cy="1371600"/>
           </a:xfrm>
           <a:prstGeom prst="roundRect">
@@ -9962,13 +10948,13 @@
       </p:sp>
       <p:sp>
         <p:nvSpPr>
-          <p:cNvPr id="7" name="TextBox 6"/>
+          <p:cNvPr id="5" name="TextBox 4"/>
           <p:cNvSpPr txBox="1"/>
           <p:nvPr/>
         </p:nvSpPr>
         <p:spPr>
           <a:xfrm>
-            <a:off x="6400800" y="1801368"/>
+            <a:off x="777240" y="1801368"/>
             <a:ext cx="5029200" cy="1143000"/>
           </a:xfrm>
           <a:prstGeom prst="rect">
@@ -9994,7 +10980,7 @@
                 </a:solidFill>
                 <a:latin typeface="Consolas"/>
               </a:rPr>
-              <a:t>Texture is not readable</a:t>
+              <a:t>UnassignedReferenceException</a:t>
             </a:r>
           </a:p>
           <a:p>
@@ -10010,20 +10996,20 @@
                 </a:solidFill>
                 <a:latin typeface="Calibri"/>
               </a:rPr>
-              <a:t>La imagen del personaje perdió Read/Write Enabled. Márcalo y pulsa Apply.</a:t>
-            </a:r>
-          </a:p>
-        </p:txBody>
-      </p:sp>
-      <p:sp>
-        <p:nvSpPr>
-          <p:cNvPr id="8" name="Rounded Rectangle 7"/>
+              <a:t>Una casilla del Inspector quedó vacía. El mensaje dice cuál: arrastra el objeto.</a:t>
+            </a:r>
+          </a:p>
+        </p:txBody>
+      </p:sp>
+      <p:sp>
+        <p:nvSpPr>
+          <p:cNvPr id="6" name="Rounded Rectangle 5"/>
           <p:cNvSpPr/>
           <p:nvPr/>
         </p:nvSpPr>
         <p:spPr>
           <a:xfrm>
-            <a:off x="548640" y="3182112"/>
+            <a:off x="6172200" y="1645920"/>
             <a:ext cx="5440680" cy="1371600"/>
           </a:xfrm>
           <a:prstGeom prst="roundRect">
@@ -10063,13 +11049,13 @@
       </p:sp>
       <p:sp>
         <p:nvSpPr>
-          <p:cNvPr id="9" name="TextBox 8"/>
+          <p:cNvPr id="7" name="TextBox 6"/>
           <p:cNvSpPr txBox="1"/>
           <p:nvPr/>
         </p:nvSpPr>
         <p:spPr>
           <a:xfrm>
-            <a:off x="777240" y="3337560"/>
+            <a:off x="6400800" y="1801368"/>
             <a:ext cx="5029200" cy="1143000"/>
           </a:xfrm>
           <a:prstGeom prst="rect">
@@ -10095,7 +11081,7 @@
                 </a:solidFill>
                 <a:latin typeface="Consolas"/>
               </a:rPr>
-              <a:t>Los botones del menú no responden</a:t>
+              <a:t>Texture is not readable</a:t>
             </a:r>
           </a:p>
           <a:p>
@@ -10111,20 +11097,20 @@
                 </a:solidFill>
                 <a:latin typeface="Calibri"/>
               </a:rPr>
-              <a:t>Falta el EventSystem. GameObject &gt; UI &gt; Event System.</a:t>
-            </a:r>
-          </a:p>
-        </p:txBody>
-      </p:sp>
-      <p:sp>
-        <p:nvSpPr>
-          <p:cNvPr id="10" name="Rounded Rectangle 9"/>
+              <a:t>La imagen del personaje perdió Read/Write Enabled. Márcalo y pulsa Apply.</a:t>
+            </a:r>
+          </a:p>
+        </p:txBody>
+      </p:sp>
+      <p:sp>
+        <p:nvSpPr>
+          <p:cNvPr id="8" name="Rounded Rectangle 7"/>
           <p:cNvSpPr/>
           <p:nvPr/>
         </p:nvSpPr>
         <p:spPr>
           <a:xfrm>
-            <a:off x="6172200" y="3182112"/>
+            <a:off x="548640" y="3182112"/>
             <a:ext cx="5440680" cy="1371600"/>
           </a:xfrm>
           <a:prstGeom prst="roundRect">
@@ -10164,13 +11150,13 @@
       </p:sp>
       <p:sp>
         <p:nvSpPr>
-          <p:cNvPr id="11" name="TextBox 10"/>
+          <p:cNvPr id="9" name="TextBox 8"/>
           <p:cNvSpPr txBox="1"/>
           <p:nvPr/>
         </p:nvSpPr>
         <p:spPr>
           <a:xfrm>
-            <a:off x="6400800" y="3337560"/>
+            <a:off x="777240" y="3337560"/>
             <a:ext cx="5029200" cy="1143000"/>
           </a:xfrm>
           <a:prstGeom prst="rect">
@@ -10196,7 +11182,7 @@
                 </a:solidFill>
                 <a:latin typeface="Consolas"/>
               </a:rPr>
-              <a:t>El clic no pinta ni pulsa</a:t>
+              <a:t>Los botones del menú no responden</a:t>
             </a:r>
           </a:p>
           <a:p>
@@ -10212,20 +11198,20 @@
                 </a:solidFill>
                 <a:latin typeface="Calibri"/>
               </a:rPr>
-              <a:t>Haz un clic en la ventana Game: el navegador y Unity piden permiso para capturar el mouse.</a:t>
-            </a:r>
-          </a:p>
-        </p:txBody>
-      </p:sp>
-      <p:sp>
-        <p:nvSpPr>
-          <p:cNvPr id="12" name="Rounded Rectangle 11"/>
+              <a:t>Falta el EventSystem. GameObject &gt; UI &gt; Event System.</a:t>
+            </a:r>
+          </a:p>
+        </p:txBody>
+      </p:sp>
+      <p:sp>
+        <p:nvSpPr>
+          <p:cNvPr id="10" name="Rounded Rectangle 9"/>
           <p:cNvSpPr/>
           <p:nvPr/>
         </p:nvSpPr>
         <p:spPr>
           <a:xfrm>
-            <a:off x="548640" y="4718304"/>
+            <a:off x="6172200" y="3182112"/>
             <a:ext cx="5440680" cy="1371600"/>
           </a:xfrm>
           <a:prstGeom prst="roundRect">
@@ -10265,13 +11251,13 @@
       </p:sp>
       <p:sp>
         <p:nvSpPr>
-          <p:cNvPr id="13" name="TextBox 12"/>
+          <p:cNvPr id="11" name="TextBox 10"/>
           <p:cNvSpPr txBox="1"/>
           <p:nvPr/>
         </p:nvSpPr>
         <p:spPr>
           <a:xfrm>
-            <a:off x="777240" y="4873752"/>
+            <a:off x="6400800" y="3337560"/>
             <a:ext cx="5029200" cy="1143000"/>
           </a:xfrm>
           <a:prstGeom prst="rect">
@@ -10297,7 +11283,7 @@
                 </a:solidFill>
                 <a:latin typeface="Consolas"/>
               </a:rPr>
-              <a:t>No salen obstáculos ni suena nada</a:t>
+              <a:t>El clic no pinta ni pulsa</a:t>
             </a:r>
           </a:p>
           <a:p>
@@ -10313,20 +11299,20 @@
                 </a:solidFill>
                 <a:latin typeface="Calibri"/>
               </a:rPr>
-              <a:t>El género del botón y el de Musica Por Genero no se escriben igual.</a:t>
-            </a:r>
-          </a:p>
-        </p:txBody>
-      </p:sp>
-      <p:sp>
-        <p:nvSpPr>
-          <p:cNvPr id="14" name="Rounded Rectangle 13"/>
+              <a:t>Haz un clic en la ventana Game: el navegador y Unity piden permiso para capturar el mouse.</a:t>
+            </a:r>
+          </a:p>
+        </p:txBody>
+      </p:sp>
+      <p:sp>
+        <p:nvSpPr>
+          <p:cNvPr id="12" name="Rounded Rectangle 11"/>
           <p:cNvSpPr/>
           <p:nvPr/>
         </p:nvSpPr>
         <p:spPr>
           <a:xfrm>
-            <a:off x="6172200" y="4718304"/>
+            <a:off x="548640" y="4718304"/>
             <a:ext cx="5440680" cy="1371600"/>
           </a:xfrm>
           <a:prstGeom prst="roundRect">
@@ -10366,13 +11352,13 @@
       </p:sp>
       <p:sp>
         <p:nvSpPr>
-          <p:cNvPr id="15" name="TextBox 14"/>
+          <p:cNvPr id="13" name="TextBox 12"/>
           <p:cNvSpPr txBox="1"/>
           <p:nvPr/>
         </p:nvSpPr>
         <p:spPr>
           <a:xfrm>
-            <a:off x="6400800" y="4873752"/>
+            <a:off x="777240" y="4873752"/>
             <a:ext cx="5029200" cy="1143000"/>
           </a:xfrm>
           <a:prstGeom prst="rect">
@@ -10398,7 +11384,7 @@
                 </a:solidFill>
                 <a:latin typeface="Consolas"/>
               </a:rPr>
-              <a:t>Escape y el mouse queda suelto</a:t>
+              <a:t>No salen obstáculos ni suena nada</a:t>
             </a:r>
           </a:p>
           <a:p>
@@ -10414,21 +11400,67 @@
                 </a:solidFill>
                 <a:latin typeface="Calibri"/>
               </a:rPr>
-              <a:t>Es a propósito, para poder salir. Un clic lo vuelve a capturar.</a:t>
-            </a:r>
-          </a:p>
-        </p:txBody>
-      </p:sp>
-      <p:sp>
-        <p:nvSpPr>
-          <p:cNvPr id="16" name="Pie"/>
+              <a:t>El género del botón y el de Musica Por Genero no se escriben igual.</a:t>
+            </a:r>
+          </a:p>
+        </p:txBody>
+      </p:sp>
+      <p:sp>
+        <p:nvSpPr>
+          <p:cNvPr id="14" name="Rounded Rectangle 13"/>
+          <p:cNvSpPr/>
+          <p:nvPr/>
+        </p:nvSpPr>
+        <p:spPr>
+          <a:xfrm>
+            <a:off x="6172200" y="4718304"/>
+            <a:ext cx="5440680" cy="1371600"/>
+          </a:xfrm>
+          <a:prstGeom prst="roundRect">
+            <a:avLst>
+              <a:gd name="adj" fmla="val 6000"/>
+            </a:avLst>
+          </a:prstGeom>
+          <a:solidFill>
+            <a:srgbClr val="FFFFFF"/>
+          </a:solidFill>
+          <a:ln w="12700">
+            <a:solidFill>
+              <a:srgbClr val="D2DAE9"/>
+            </a:solidFill>
+          </a:ln>
+          <a:effectLst/>
+        </p:spPr>
+        <p:style>
+          <a:lnRef idx="1">
+            <a:schemeClr val="accent1"/>
+          </a:lnRef>
+          <a:fillRef idx="3">
+            <a:schemeClr val="accent1"/>
+          </a:fillRef>
+          <a:effectRef idx="2">
+            <a:schemeClr val="accent1"/>
+          </a:effectRef>
+          <a:fontRef idx="minor">
+            <a:schemeClr val="lt1"/>
+          </a:fontRef>
+        </p:style>
+        <p:txBody>
+          <a:bodyPr rtlCol="0" anchor="ctr"/>
+          <a:lstStyle/>
+          <a:p/>
+        </p:txBody>
+      </p:sp>
+      <p:sp>
+        <p:nvSpPr>
+          <p:cNvPr id="15" name="TextBox 14"/>
           <p:cNvSpPr txBox="1"/>
           <p:nvPr/>
         </p:nvSpPr>
         <p:spPr>
           <a:xfrm>
-            <a:off x="548640" y="6400800"/>
-            <a:ext cx="11064240" cy="274320"/>
+            <a:off x="6400800" y="4873752"/>
+            <a:ext cx="5029200" cy="1143000"/>
           </a:xfrm>
           <a:prstGeom prst="rect">
             <a:avLst/>
@@ -10441,6 +11473,61 @@
           </a:bodyPr>
           <a:lstStyle/>
           <a:p>
+            <a:pPr algn="l">
+              <a:spcAft>
+                <a:spcPts val="400"/>
+              </a:spcAft>
+            </a:pPr>
+            <a:r>
+              <a:rPr sz="1300" b="1" i="0">
+                <a:solidFill>
+                  <a:srgbClr val="B3261E"/>
+                </a:solidFill>
+                <a:latin typeface="Consolas"/>
+              </a:rPr>
+              <a:t>Escape y el mouse queda suelto</a:t>
+            </a:r>
+          </a:p>
+          <a:p>
+            <a:pPr algn="l">
+              <a:spcAft>
+                <a:spcPts val="400"/>
+              </a:spcAft>
+            </a:pPr>
+            <a:r>
+              <a:rPr sz="1400" b="0" i="0">
+                <a:solidFill>
+                  <a:srgbClr val="0A0E1A"/>
+                </a:solidFill>
+                <a:latin typeface="Calibri"/>
+              </a:rPr>
+              <a:t>Es a propósito, para poder salir. Un clic lo vuelve a capturar.</a:t>
+            </a:r>
+          </a:p>
+        </p:txBody>
+      </p:sp>
+      <p:sp>
+        <p:nvSpPr>
+          <p:cNvPr id="16" name="Pie"/>
+          <p:cNvSpPr txBox="1"/>
+          <p:nvPr/>
+        </p:nvSpPr>
+        <p:spPr>
+          <a:xfrm>
+            <a:off x="548640" y="6400800"/>
+            <a:ext cx="11064240" cy="274320"/>
+          </a:xfrm>
+          <a:prstGeom prst="rect">
+            <a:avLst/>
+          </a:prstGeom>
+          <a:noFill/>
+        </p:spPr>
+        <p:txBody>
+          <a:bodyPr wrap="square" lIns="0" rIns="0" tIns="0" bIns="0" anchor="t">
+            <a:spAutoFit/>
+          </a:bodyPr>
+          <a:lstStyle/>
+          <a:p>
             <a:pPr algn="r">
               <a:spcAft>
                 <a:spcPts val="600"/>
@@ -10453,7 +11540,7 @@
                 </a:solidFill>
                 <a:latin typeface="Calibri"/>
               </a:rPr>
-              <a:t>Guía 1 · Motricidad  ·  15 de 16</a:t>
+              <a:t>Guía 1 · Motricidad  ·  16 de 17</a:t>
             </a:r>
           </a:p>
         </p:txBody>
@@ -10466,7 +11553,7 @@
 </p:sld>
 </file>
 
-<file path=ppt/slides/slide16.xml><?xml version="1.0" encoding="utf-8"?>
+<file path=ppt/slides/slide17.xml><?xml version="1.0" encoding="utf-8"?>
 <p:sld xmlns:a="http://schemas.openxmlformats.org/drawingml/2006/main" xmlns:p="http://schemas.openxmlformats.org/presentationml/2006/main" xmlns:r="http://schemas.openxmlformats.org/officeDocument/2006/relationships">
   <p:cSld>
     <p:bg>
@@ -10951,7 +12038,7 @@
                 </a:solidFill>
                 <a:latin typeface="Calibri"/>
               </a:rPr>
-              <a:t>Guía 1 · Motricidad  ·  16 de 16</a:t>
+              <a:t>Guía 1 · Motricidad  ·  17 de 17</a:t>
             </a:r>
           </a:p>
         </p:txBody>
@@ -12036,7 +13123,7 @@
                 </a:solidFill>
                 <a:latin typeface="Calibri"/>
               </a:rPr>
-              <a:t>Guía 1 · Motricidad  ·  2 de 16</a:t>
+              <a:t>Guía 1 · Motricidad  ·  2 de 17</a:t>
             </a:r>
           </a:p>
         </p:txBody>
@@ -12273,7 +13360,7 @@
                 </a:solidFill>
                 <a:latin typeface="Calibri"/>
               </a:rPr>
-              <a:t>Cursor, PantallaFinal, BotonListo, ColorDePaleta, Pua, Sierra</a:t>
+              <a:t>Cursor, Pausa, PantallaFinal, BotonListo, ColorDePaleta, Pua, Sierra</a:t>
             </a:r>
           </a:p>
           <a:p>
@@ -13013,7 +14100,7 @@
                 </a:solidFill>
                 <a:latin typeface="Calibri"/>
               </a:rPr>
-              <a:t>Guía 1 · Motricidad  ·  3 de 16</a:t>
+              <a:t>Guía 1 · Motricidad  ·  3 de 17</a:t>
             </a:r>
           </a:p>
         </p:txBody>
@@ -13560,7 +14647,7 @@
                 </a:solidFill>
                 <a:latin typeface="Calibri"/>
               </a:rPr>
-              <a:t>Guía 1 · Motricidad  ·  4 de 16</a:t>
+              <a:t>Guía 1 · Motricidad  ·  4 de 17</a:t>
             </a:r>
           </a:p>
         </p:txBody>
@@ -14533,7 +15620,7 @@
                 </a:solidFill>
                 <a:latin typeface="Calibri"/>
               </a:rPr>
-              <a:t>Guía 1 · Motricidad  ·  5 de 16</a:t>
+              <a:t>Guía 1 · Motricidad  ·  5 de 17</a:t>
             </a:r>
           </a:p>
         </p:txBody>
@@ -15391,7 +16478,7 @@
                 </a:solidFill>
                 <a:latin typeface="Calibri"/>
               </a:rPr>
-              <a:t>Guía 1 · Motricidad  ·  6 de 16</a:t>
+              <a:t>Guía 1 · Motricidad  ·  6 de 17</a:t>
             </a:r>
           </a:p>
         </p:txBody>
@@ -16364,7 +17451,7 @@
                 </a:solidFill>
                 <a:latin typeface="Calibri"/>
               </a:rPr>
-              <a:t>Guía 1 · Motricidad  ·  7 de 16</a:t>
+              <a:t>Guía 1 · Motricidad  ·  7 de 17</a:t>
             </a:r>
           </a:p>
         </p:txBody>
@@ -17415,7 +18502,7 @@
                 </a:solidFill>
                 <a:latin typeface="Calibri"/>
               </a:rPr>
-              <a:t>Guía 1 · Motricidad  ·  8 de 16</a:t>
+              <a:t>Guía 1 · Motricidad  ·  8 de 17</a:t>
             </a:r>
           </a:p>
         </p:txBody>
@@ -18442,7 +19529,7 @@
                 </a:solidFill>
                 <a:latin typeface="Calibri"/>
               </a:rPr>
-              <a:t>Guía 1 · Motricidad  ·  9 de 16</a:t>
+              <a:t>Guía 1 · Motricidad  ·  9 de 17</a:t>
             </a:r>
           </a:p>
         </p:txBody>
